--- a/assets/Dongsu_Park_Portfolio.pptx
+++ b/assets/Dongsu_Park_Portfolio.pptx
@@ -18964,6 +18964,823 @@
     <p:bg>
       <p:bgPr>
         <a:solidFill>
+          <a:srgbClr val="FFFFFF"/>
+        </a:solidFill>
+      </p:bgPr>
+    </p:bg>
+    <p:spTree>
+      <p:nvGrpSpPr>
+        <p:cNvPr id="1" name=""/>
+        <p:cNvGrpSpPr/>
+        <p:nvPr/>
+      </p:nvGrpSpPr>
+      <p:grpSpPr>
+        <a:xfrm>
+          <a:off x="0" y="0"/>
+          <a:ext cx="0" cy="0"/>
+          <a:chOff x="0" y="0"/>
+          <a:chExt cx="0" cy="0"/>
+        </a:xfrm>
+      </p:grpSpPr>
+      <p:sp>
+        <p:nvSpPr>
+          <p:cNvPr id="2" name="Text 0"/>
+          <p:cNvSpPr txBox="1"/>
+          <p:nvPr/>
+        </p:nvSpPr>
+        <p:spPr>
+          <a:xfrm>
+            <a:off x="548640" y="365760"/>
+            <a:ext cx="11094415" cy="274320"/>
+          </a:xfrm>
+          <a:prstGeom prst="rect">
+            <a:avLst/>
+          </a:prstGeom>
+          <a:noFill/>
+          <a:ln/>
+        </p:spPr>
+        <p:txBody>
+          <a:bodyPr wrap="square" lIns="0" tIns="0" rIns="0" bIns="0" rtlCol="0" anchor="t"/>
+          <a:lstStyle/>
+          <a:p>
+            <a:pPr indent="0" marL="0">
+              <a:buNone/>
+            </a:pPr>
+            <a:r>
+              <a:rPr lang="en-US" sz="1100" b="1" dirty="0">
+                <a:solidFill>
+                  <a:srgbClr val="1F6FE0"/>
+                </a:solidFill>
+                <a:latin typeface="Malgun Gothic" pitchFamily="34" charset="0"/>
+                <a:ea typeface="Malgun Gothic" pitchFamily="34" charset="-122"/>
+                <a:cs typeface="Malgun Gothic" pitchFamily="34" charset="-120"/>
+              </a:rPr>
+              <a:t>01  EMR 데이터 FHIR 변환 통합 관리 시스템 설계 및 개발</a:t>
+            </a:r>
+            <a:endParaRPr lang="en-US" sz="1100" dirty="0"/>
+          </a:p>
+        </p:txBody>
+      </p:sp>
+      <p:sp>
+        <p:nvSpPr>
+          <p:cNvPr id="3" name="Text 1"/>
+          <p:cNvSpPr txBox="1"/>
+          <p:nvPr/>
+        </p:nvSpPr>
+        <p:spPr>
+          <a:xfrm>
+            <a:off x="548640" y="658368"/>
+            <a:ext cx="11094415" cy="566928"/>
+          </a:xfrm>
+          <a:prstGeom prst="rect">
+            <a:avLst/>
+          </a:prstGeom>
+          <a:noFill/>
+          <a:ln/>
+        </p:spPr>
+        <p:txBody>
+          <a:bodyPr wrap="square" lIns="0" tIns="0" rIns="0" bIns="0" rtlCol="0" anchor="ctr"/>
+          <a:lstStyle/>
+          <a:p>
+            <a:pPr indent="0" marL="0">
+              <a:buNone/>
+            </a:pPr>
+            <a:r>
+              <a:rPr lang="en-US" sz="2200" b="1" dirty="0">
+                <a:solidFill>
+                  <a:srgbClr val="1A1D24"/>
+                </a:solidFill>
+                <a:latin typeface="Malgun Gothic" pitchFamily="34" charset="0"/>
+                <a:ea typeface="Malgun Gothic" pitchFamily="34" charset="-122"/>
+                <a:cs typeface="Malgun Gothic" pitchFamily="34" charset="-120"/>
+              </a:rPr>
+              <a:t>EMR 데이터 FHIR 변환 통합 관리 시스템 설계 및 개발</a:t>
+            </a:r>
+            <a:endParaRPr lang="en-US" sz="2200" dirty="0"/>
+          </a:p>
+        </p:txBody>
+      </p:sp>
+      <p:sp>
+        <p:nvSpPr>
+          <p:cNvPr id="4" name="Text 2"/>
+          <p:cNvSpPr txBox="1"/>
+          <p:nvPr/>
+        </p:nvSpPr>
+        <p:spPr>
+          <a:xfrm>
+            <a:off x="548640" y="1243584"/>
+            <a:ext cx="11094415" cy="274320"/>
+          </a:xfrm>
+          <a:prstGeom prst="rect">
+            <a:avLst/>
+          </a:prstGeom>
+          <a:noFill/>
+          <a:ln/>
+        </p:spPr>
+        <p:txBody>
+          <a:bodyPr wrap="square" lIns="0" tIns="0" rIns="0" bIns="0" rtlCol="0" anchor="t"/>
+          <a:lstStyle/>
+          <a:p>
+            <a:pPr indent="0" marL="0">
+              <a:buNone/>
+            </a:pPr>
+            <a:r>
+              <a:rPr lang="en-US" sz="1050" dirty="0">
+                <a:solidFill>
+                  <a:srgbClr val="6B7280"/>
+                </a:solidFill>
+                <a:latin typeface="Malgun Gothic" pitchFamily="34" charset="0"/>
+                <a:ea typeface="Malgun Gothic" pitchFamily="34" charset="-122"/>
+                <a:cs typeface="Malgun Gothic" pitchFamily="34" charset="-120"/>
+              </a:rPr>
+              <a:t>파이 디지털 헬스케어   ·   2024.06 ~ 현재      Backend / Frontend / AI / LLM</a:t>
+            </a:r>
+            <a:endParaRPr lang="en-US" sz="1050" dirty="0"/>
+          </a:p>
+        </p:txBody>
+      </p:sp>
+      <p:sp>
+        <p:nvSpPr>
+          <p:cNvPr id="5" name="Text 3"/>
+          <p:cNvSpPr txBox="1"/>
+          <p:nvPr/>
+        </p:nvSpPr>
+        <p:spPr>
+          <a:xfrm>
+            <a:off x="548640" y="1645920"/>
+            <a:ext cx="6035040" cy="506095"/>
+          </a:xfrm>
+          <a:prstGeom prst="rect">
+            <a:avLst/>
+          </a:prstGeom>
+          <a:noFill/>
+          <a:ln/>
+        </p:spPr>
+        <p:txBody>
+          <a:bodyPr wrap="square" lIns="0" tIns="0" rIns="0" bIns="0" rtlCol="0" anchor="t"/>
+          <a:lstStyle/>
+          <a:p>
+            <a:pPr indent="0" marL="0">
+              <a:lnSpc>
+                <a:spcPct val="135000"/>
+              </a:lnSpc>
+              <a:buNone/>
+            </a:pPr>
+            <a:r>
+              <a:rPr lang="en-US" sz="1250" b="1" dirty="0">
+                <a:solidFill>
+                  <a:srgbClr val="1F6FE0"/>
+                </a:solidFill>
+                <a:latin typeface="Malgun Gothic" pitchFamily="34" charset="0"/>
+                <a:ea typeface="Malgun Gothic" pitchFamily="34" charset="-122"/>
+                <a:cs typeface="Malgun Gothic" pitchFamily="34" charset="-120"/>
+              </a:rPr>
+              <a:t>요약  </a:t>
+            </a:r>
+            <a:pPr indent="0" marL="0">
+              <a:lnSpc>
+                <a:spcPct val="135000"/>
+              </a:lnSpc>
+              <a:buNone/>
+            </a:pPr>
+            <a:r>
+              <a:rPr lang="en-US" sz="1250" b="1" dirty="0">
+                <a:solidFill>
+                  <a:srgbClr val="1A1D24"/>
+                </a:solidFill>
+                <a:latin typeface="Malgun Gothic" pitchFamily="34" charset="0"/>
+                <a:ea typeface="Malgun Gothic" pitchFamily="34" charset="-122"/>
+                <a:cs typeface="Malgun Gothic" pitchFamily="34" charset="-120"/>
+              </a:rPr>
+              <a:t>병원마다 다른 진료 기록을 세계 표준 형식으로 바꿔 주는 변환 도구를 만들었고, 이 방식으로 특허를 받았습니다.</a:t>
+            </a:r>
+            <a:endParaRPr lang="en-US" sz="1250" dirty="0"/>
+          </a:p>
+        </p:txBody>
+      </p:sp>
+      <p:sp>
+        <p:nvSpPr>
+          <p:cNvPr id="6" name="Text 4"/>
+          <p:cNvSpPr txBox="1"/>
+          <p:nvPr/>
+        </p:nvSpPr>
+        <p:spPr>
+          <a:xfrm>
+            <a:off x="548640" y="2261743"/>
+            <a:ext cx="6035040" cy="736283"/>
+          </a:xfrm>
+          <a:prstGeom prst="rect">
+            <a:avLst/>
+          </a:prstGeom>
+          <a:noFill/>
+          <a:ln/>
+        </p:spPr>
+        <p:txBody>
+          <a:bodyPr wrap="square" lIns="0" tIns="0" rIns="0" bIns="0" rtlCol="0" anchor="t"/>
+          <a:lstStyle/>
+          <a:p>
+            <a:pPr indent="0" marL="0">
+              <a:lnSpc>
+                <a:spcPct val="135000"/>
+              </a:lnSpc>
+              <a:buNone/>
+            </a:pPr>
+            <a:r>
+              <a:rPr lang="en-US" sz="1250" dirty="0">
+                <a:solidFill>
+                  <a:srgbClr val="444B57"/>
+                </a:solidFill>
+                <a:latin typeface="Malgun Gothic" pitchFamily="34" charset="0"/>
+                <a:ea typeface="Malgun Gothic" pitchFamily="34" charset="-122"/>
+                <a:cs typeface="Malgun Gothic" pitchFamily="34" charset="-120"/>
+              </a:rPr>
+              <a:t>병원마다 다른 의료데이터를 국제 표준인 HL7 FHIR 형식으로 변환하고 관리하는 웹 기반 통합 시스템. 변환 방식에 대한 특허 출원 및 등록 완료.</a:t>
+            </a:r>
+            <a:endParaRPr lang="en-US" sz="1250" dirty="0"/>
+          </a:p>
+        </p:txBody>
+      </p:sp>
+      <p:sp>
+        <p:nvSpPr>
+          <p:cNvPr id="7" name="Shape 5"/>
+          <p:cNvSpPr/>
+          <p:nvPr/>
+        </p:nvSpPr>
+        <p:spPr>
+          <a:xfrm>
+            <a:off x="548640" y="3135185"/>
+            <a:ext cx="6035040" cy="2004060"/>
+          </a:xfrm>
+          <a:prstGeom prst="roundRect">
+            <a:avLst>
+              <a:gd name="adj" fmla="val 3650"/>
+            </a:avLst>
+          </a:prstGeom>
+          <a:solidFill>
+            <a:srgbClr val="F4F6F9"/>
+          </a:solidFill>
+          <a:ln w="12700">
+            <a:solidFill>
+              <a:srgbClr val="E3E6EB"/>
+            </a:solidFill>
+            <a:prstDash val="solid"/>
+          </a:ln>
+        </p:spPr>
+      </p:sp>
+      <p:sp>
+        <p:nvSpPr>
+          <p:cNvPr id="8" name="Text 6"/>
+          <p:cNvSpPr txBox="1"/>
+          <p:nvPr/>
+        </p:nvSpPr>
+        <p:spPr>
+          <a:xfrm>
+            <a:off x="822960" y="3272345"/>
+            <a:ext cx="5486400" cy="1775460"/>
+          </a:xfrm>
+          <a:prstGeom prst="rect">
+            <a:avLst/>
+          </a:prstGeom>
+          <a:noFill/>
+          <a:ln/>
+        </p:spPr>
+        <p:txBody>
+          <a:bodyPr wrap="square" lIns="0" tIns="0" rIns="0" bIns="0" rtlCol="0" anchor="t"/>
+          <a:lstStyle/>
+          <a:p>
+            <a:pPr indent="0" marL="0">
+              <a:lnSpc>
+                <a:spcPct val="135000"/>
+              </a:lnSpc>
+              <a:spcAft>
+                <a:spcPts val="600"/>
+              </a:spcAft>
+              <a:buNone/>
+            </a:pPr>
+            <a:r>
+              <a:rPr lang="en-US" sz="1200" dirty="0">
+                <a:solidFill>
+                  <a:srgbClr val="444B57"/>
+                </a:solidFill>
+                <a:latin typeface="Malgun Gothic" pitchFamily="34" charset="0"/>
+                <a:ea typeface="Malgun Gothic" pitchFamily="34" charset="-122"/>
+                <a:cs typeface="Malgun Gothic" pitchFamily="34" charset="-120"/>
+              </a:rPr>
+              <a:t>병원마다 다른 의료데이터를 국제 표준인 HL7 FHIR 형식으로 변환하고 관리할 수 있는 웹 기반 통합 시스템을 설계·개발했습니다.</a:t>
+            </a:r>
+            <a:endParaRPr lang="en-US" sz="1200" dirty="0"/>
+          </a:p>
+          <a:p>
+            <a:pPr indent="0" marL="0">
+              <a:lnSpc>
+                <a:spcPct val="135000"/>
+              </a:lnSpc>
+              <a:spcAft>
+                <a:spcPts val="600"/>
+              </a:spcAft>
+              <a:buNone/>
+            </a:pPr>
+            <a:r>
+              <a:rPr lang="en-US" sz="1200" dirty="0">
+                <a:solidFill>
+                  <a:srgbClr val="444B57"/>
+                </a:solidFill>
+                <a:latin typeface="Malgun Gothic" pitchFamily="34" charset="0"/>
+                <a:ea typeface="Malgun Gothic" pitchFamily="34" charset="-122"/>
+                <a:cs typeface="Malgun Gothic" pitchFamily="34" charset="-120"/>
+              </a:rPr>
+              <a:t>기존에는 FHIR 변환 과정에 필요한 여러 도구를 개별적으로 활용해야 했는데, 이를 하나의 시스템으로 통합했습니다.</a:t>
+            </a:r>
+            <a:endParaRPr lang="en-US" sz="1200" dirty="0"/>
+          </a:p>
+          <a:p>
+            <a:pPr indent="0" marL="0">
+              <a:lnSpc>
+                <a:spcPct val="135000"/>
+              </a:lnSpc>
+              <a:spcAft>
+                <a:spcPts val="600"/>
+              </a:spcAft>
+              <a:buNone/>
+            </a:pPr>
+            <a:r>
+              <a:rPr lang="en-US" sz="1200" dirty="0">
+                <a:solidFill>
+                  <a:srgbClr val="444B57"/>
+                </a:solidFill>
+                <a:latin typeface="Malgun Gothic" pitchFamily="34" charset="0"/>
+                <a:ea typeface="Malgun Gothic" pitchFamily="34" charset="-122"/>
+                <a:cs typeface="Malgun Gothic" pitchFamily="34" charset="-120"/>
+              </a:rPr>
+              <a:t>의료기관의 데이터 구조와 변환 요구사항을 고려해 확장성 있게 시스템을 설계했으며, 변환 방식에 대한 특허를 출원하고 등록까지 완료했습니다.</a:t>
+            </a:r>
+            <a:endParaRPr lang="en-US" sz="1200" dirty="0"/>
+          </a:p>
+        </p:txBody>
+      </p:sp>
+      <p:pic>
+        <p:nvPicPr>
+          <p:cNvPr id="9" name="Image 0" descr="/home/user/portfolio/assets/images/projects/fhir-workbench-1.jpg">    </p:cNvPr>
+          <p:cNvPicPr>
+            <a:picLocks noChangeAspect="1"/>
+          </p:cNvPicPr>
+          <p:nvPr/>
+        </p:nvPicPr>
+        <p:blipFill>
+          <a:blip r:embed="rId1"/>
+          <a:stretch>
+            <a:fillRect/>
+          </a:stretch>
+        </p:blipFill>
+        <p:spPr>
+          <a:xfrm>
+            <a:off x="6995160" y="1645920"/>
+            <a:ext cx="3665989" cy="1706976"/>
+          </a:xfrm>
+          <a:prstGeom prst="rect">
+            <a:avLst/>
+          </a:prstGeom>
+        </p:spPr>
+      </p:pic>
+      <p:sp>
+        <p:nvSpPr>
+          <p:cNvPr id="10" name="Text 7"/>
+          <p:cNvSpPr txBox="1"/>
+          <p:nvPr/>
+        </p:nvSpPr>
+        <p:spPr>
+          <a:xfrm>
+            <a:off x="6995160" y="3535776"/>
+            <a:ext cx="4647895" cy="256032"/>
+          </a:xfrm>
+          <a:prstGeom prst="rect">
+            <a:avLst/>
+          </a:prstGeom>
+          <a:noFill/>
+          <a:ln/>
+        </p:spPr>
+        <p:txBody>
+          <a:bodyPr wrap="square" lIns="0" tIns="0" rIns="0" bIns="0" rtlCol="0" anchor="t"/>
+          <a:lstStyle/>
+          <a:p>
+            <a:pPr indent="0" marL="0">
+              <a:buNone/>
+            </a:pPr>
+            <a:r>
+              <a:rPr lang="en-US" sz="950" b="1" spc="200" kern="0" dirty="0">
+                <a:solidFill>
+                  <a:srgbClr val="1F6FE0"/>
+                </a:solidFill>
+                <a:latin typeface="Malgun Gothic" pitchFamily="34" charset="0"/>
+                <a:ea typeface="Malgun Gothic" pitchFamily="34" charset="-122"/>
+                <a:cs typeface="Malgun Gothic" pitchFamily="34" charset="-120"/>
+              </a:rPr>
+              <a:t>역할 · 수행 내용</a:t>
+            </a:r>
+            <a:endParaRPr lang="en-US" sz="950" dirty="0"/>
+          </a:p>
+        </p:txBody>
+      </p:sp>
+      <p:sp>
+        <p:nvSpPr>
+          <p:cNvPr id="11" name="Text 8"/>
+          <p:cNvSpPr txBox="1"/>
+          <p:nvPr/>
+        </p:nvSpPr>
+        <p:spPr>
+          <a:xfrm>
+            <a:off x="6995160" y="3810096"/>
+            <a:ext cx="4647895" cy="1370457"/>
+          </a:xfrm>
+          <a:prstGeom prst="rect">
+            <a:avLst/>
+          </a:prstGeom>
+          <a:noFill/>
+          <a:ln/>
+        </p:spPr>
+        <p:txBody>
+          <a:bodyPr wrap="square" lIns="0" tIns="0" rIns="0" bIns="0" rtlCol="0" anchor="t"/>
+          <a:lstStyle/>
+          <a:p>
+            <a:pPr marL="152400" indent="-152400">
+              <a:lnSpc>
+                <a:spcPct val="130000"/>
+              </a:lnSpc>
+              <a:spcAft>
+                <a:spcPts val="400"/>
+              </a:spcAft>
+              <a:buSzPct val="100000"/>
+              <a:buChar char="•"/>
+            </a:pPr>
+            <a:r>
+              <a:rPr lang="en-US" sz="900" dirty="0">
+                <a:solidFill>
+                  <a:srgbClr val="1A1D24"/>
+                </a:solidFill>
+                <a:latin typeface="Malgun Gothic" pitchFamily="34" charset="0"/>
+                <a:ea typeface="Malgun Gothic" pitchFamily="34" charset="-122"/>
+                <a:cs typeface="Malgun Gothic" pitchFamily="34" charset="-120"/>
+              </a:rPr>
+              <a:t>전체 아키텍처 설계부터 React·FastAPI 기반 프론트엔드·백엔드 개발 및 배포·운영</a:t>
+            </a:r>
+            <a:endParaRPr lang="en-US" sz="900" dirty="0"/>
+          </a:p>
+          <a:p>
+            <a:pPr marL="152400" indent="-152400">
+              <a:lnSpc>
+                <a:spcPct val="130000"/>
+              </a:lnSpc>
+              <a:spcAft>
+                <a:spcPts val="400"/>
+              </a:spcAft>
+              <a:buSzPct val="100000"/>
+              <a:buChar char="•"/>
+            </a:pPr>
+            <a:r>
+              <a:rPr lang="en-US" sz="900" dirty="0">
+                <a:solidFill>
+                  <a:srgbClr val="1A1D24"/>
+                </a:solidFill>
+                <a:latin typeface="Malgun Gothic" pitchFamily="34" charset="0"/>
+                <a:ea typeface="Malgun Gothic" pitchFamily="34" charset="-122"/>
+                <a:cs typeface="Malgun Gothic" pitchFamily="34" charset="-120"/>
+              </a:rPr>
+              <a:t>자체 변환 Rule(DSL)을 설계하여 의료데이터의 FHIR 변환 및 매핑 기능 구현</a:t>
+            </a:r>
+            <a:endParaRPr lang="en-US" sz="900" dirty="0"/>
+          </a:p>
+          <a:p>
+            <a:pPr marL="152400" indent="-152400">
+              <a:lnSpc>
+                <a:spcPct val="130000"/>
+              </a:lnSpc>
+              <a:spcAft>
+                <a:spcPts val="400"/>
+              </a:spcAft>
+              <a:buSzPct val="100000"/>
+              <a:buChar char="•"/>
+            </a:pPr>
+            <a:r>
+              <a:rPr lang="en-US" sz="900" dirty="0">
+                <a:solidFill>
+                  <a:srgbClr val="1A1D24"/>
+                </a:solidFill>
+                <a:latin typeface="Malgun Gothic" pitchFamily="34" charset="0"/>
+                <a:ea typeface="Malgun Gothic" pitchFamily="34" charset="-122"/>
+                <a:cs typeface="Malgun Gothic" pitchFamily="34" charset="-120"/>
+              </a:rPr>
+              <a:t>Profile·Terminology 관리, 변환 결과 Validation, FHIR Server 연동, IG 발행 등 FHIR 변환 전 과정 통합</a:t>
+            </a:r>
+            <a:endParaRPr lang="en-US" sz="900" dirty="0"/>
+          </a:p>
+          <a:p>
+            <a:pPr marL="152400" indent="-152400">
+              <a:lnSpc>
+                <a:spcPct val="130000"/>
+              </a:lnSpc>
+              <a:spcAft>
+                <a:spcPts val="400"/>
+              </a:spcAft>
+              <a:buSzPct val="100000"/>
+              <a:buChar char="•"/>
+            </a:pPr>
+            <a:r>
+              <a:rPr lang="en-US" sz="900" dirty="0">
+                <a:solidFill>
+                  <a:srgbClr val="1A1D24"/>
+                </a:solidFill>
+                <a:latin typeface="Malgun Gothic" pitchFamily="34" charset="0"/>
+                <a:ea typeface="Malgun Gothic" pitchFamily="34" charset="-122"/>
+                <a:cs typeface="Malgun Gothic" pitchFamily="34" charset="-120"/>
+              </a:rPr>
+              <a:t>변환 이력·권한·감사 로그 등 운영 및 관리 기능 개발</a:t>
+            </a:r>
+            <a:endParaRPr lang="en-US" sz="900" dirty="0"/>
+          </a:p>
+        </p:txBody>
+      </p:sp>
+      <p:sp>
+        <p:nvSpPr>
+          <p:cNvPr id="12" name="Text 9"/>
+          <p:cNvSpPr txBox="1"/>
+          <p:nvPr/>
+        </p:nvSpPr>
+        <p:spPr>
+          <a:xfrm>
+            <a:off x="6995160" y="5345145"/>
+            <a:ext cx="4647895" cy="256032"/>
+          </a:xfrm>
+          <a:prstGeom prst="rect">
+            <a:avLst/>
+          </a:prstGeom>
+          <a:noFill/>
+          <a:ln/>
+        </p:spPr>
+        <p:txBody>
+          <a:bodyPr wrap="square" lIns="0" tIns="0" rIns="0" bIns="0" rtlCol="0" anchor="t"/>
+          <a:lstStyle/>
+          <a:p>
+            <a:pPr indent="0" marL="0">
+              <a:buNone/>
+            </a:pPr>
+            <a:r>
+              <a:rPr lang="en-US" sz="950" b="1" spc="200" kern="0" dirty="0">
+                <a:solidFill>
+                  <a:srgbClr val="1F6FE0"/>
+                </a:solidFill>
+                <a:latin typeface="Malgun Gothic" pitchFamily="34" charset="0"/>
+                <a:ea typeface="Malgun Gothic" pitchFamily="34" charset="-122"/>
+                <a:cs typeface="Malgun Gothic" pitchFamily="34" charset="-120"/>
+              </a:rPr>
+              <a:t>주요 성과 · 포인트</a:t>
+            </a:r>
+            <a:endParaRPr lang="en-US" sz="950" dirty="0"/>
+          </a:p>
+        </p:txBody>
+      </p:sp>
+      <p:sp>
+        <p:nvSpPr>
+          <p:cNvPr id="13" name="Text 10"/>
+          <p:cNvSpPr txBox="1"/>
+          <p:nvPr/>
+        </p:nvSpPr>
+        <p:spPr>
+          <a:xfrm>
+            <a:off x="6995160" y="5619465"/>
+            <a:ext cx="4647895" cy="597789"/>
+          </a:xfrm>
+          <a:prstGeom prst="rect">
+            <a:avLst/>
+          </a:prstGeom>
+          <a:noFill/>
+          <a:ln/>
+        </p:spPr>
+        <p:txBody>
+          <a:bodyPr wrap="square" lIns="0" tIns="0" rIns="0" bIns="0" rtlCol="0" anchor="t"/>
+          <a:lstStyle/>
+          <a:p>
+            <a:pPr marL="152400" indent="-152400">
+              <a:lnSpc>
+                <a:spcPct val="130000"/>
+              </a:lnSpc>
+              <a:spcAft>
+                <a:spcPts val="400"/>
+              </a:spcAft>
+              <a:buSzPct val="100000"/>
+              <a:buChar char="•"/>
+            </a:pPr>
+            <a:r>
+              <a:rPr lang="en-US" sz="900" dirty="0">
+                <a:solidFill>
+                  <a:srgbClr val="1A1D24"/>
+                </a:solidFill>
+                <a:latin typeface="Malgun Gothic" pitchFamily="34" charset="0"/>
+                <a:ea typeface="Malgun Gothic" pitchFamily="34" charset="-122"/>
+                <a:cs typeface="Malgun Gothic" pitchFamily="34" charset="-120"/>
+              </a:rPr>
+              <a:t>룰 기반 EMR → FHIR 변환 방식 특허 출원 및 등록</a:t>
+            </a:r>
+            <a:endParaRPr lang="en-US" sz="900" dirty="0"/>
+          </a:p>
+          <a:p>
+            <a:pPr marL="152400" indent="-152400">
+              <a:lnSpc>
+                <a:spcPct val="130000"/>
+              </a:lnSpc>
+              <a:spcAft>
+                <a:spcPts val="400"/>
+              </a:spcAft>
+              <a:buSzPct val="100000"/>
+              <a:buChar char="•"/>
+            </a:pPr>
+            <a:r>
+              <a:rPr lang="en-US" sz="900" dirty="0">
+                <a:solidFill>
+                  <a:srgbClr val="1A1D24"/>
+                </a:solidFill>
+                <a:latin typeface="Malgun Gothic" pitchFamily="34" charset="0"/>
+                <a:ea typeface="Malgun Gothic" pitchFamily="34" charset="-122"/>
+                <a:cs typeface="Malgun Gothic" pitchFamily="34" charset="-120"/>
+              </a:rPr>
+              <a:t>FHIR 변환·검증·발행 과정을 하나의 시스템으로 통합하여 업무 효율성과 재사용성 향상</a:t>
+            </a:r>
+            <a:endParaRPr lang="en-US" sz="900" dirty="0"/>
+          </a:p>
+        </p:txBody>
+      </p:sp>
+      <p:sp>
+        <p:nvSpPr>
+          <p:cNvPr id="14" name="Text 11"/>
+          <p:cNvSpPr txBox="1"/>
+          <p:nvPr/>
+        </p:nvSpPr>
+        <p:spPr>
+          <a:xfrm>
+            <a:off x="548640" y="5555171"/>
+            <a:ext cx="6035040" cy="237744"/>
+          </a:xfrm>
+          <a:prstGeom prst="rect">
+            <a:avLst/>
+          </a:prstGeom>
+          <a:noFill/>
+          <a:ln/>
+        </p:spPr>
+        <p:txBody>
+          <a:bodyPr wrap="square" lIns="0" tIns="0" rIns="0" bIns="0" rtlCol="0" anchor="t"/>
+          <a:lstStyle/>
+          <a:p>
+            <a:pPr indent="0" marL="0">
+              <a:buNone/>
+            </a:pPr>
+            <a:r>
+              <a:rPr lang="en-US" sz="950" b="1" spc="200" kern="0" dirty="0">
+                <a:solidFill>
+                  <a:srgbClr val="1F6FE0"/>
+                </a:solidFill>
+                <a:latin typeface="Malgun Gothic" pitchFamily="34" charset="0"/>
+                <a:ea typeface="Malgun Gothic" pitchFamily="34" charset="-122"/>
+                <a:cs typeface="Malgun Gothic" pitchFamily="34" charset="-120"/>
+              </a:rPr>
+              <a:t>연관 기술</a:t>
+            </a:r>
+            <a:endParaRPr lang="en-US" sz="950" dirty="0"/>
+          </a:p>
+        </p:txBody>
+      </p:sp>
+      <p:sp>
+        <p:nvSpPr>
+          <p:cNvPr id="15" name="Text 12"/>
+          <p:cNvSpPr txBox="1"/>
+          <p:nvPr/>
+        </p:nvSpPr>
+        <p:spPr>
+          <a:xfrm>
+            <a:off x="548640" y="5811203"/>
+            <a:ext cx="6035040" cy="543878"/>
+          </a:xfrm>
+          <a:prstGeom prst="rect">
+            <a:avLst/>
+          </a:prstGeom>
+          <a:noFill/>
+          <a:ln/>
+        </p:spPr>
+        <p:txBody>
+          <a:bodyPr wrap="square" lIns="0" tIns="0" rIns="0" bIns="0" rtlCol="0" anchor="t"/>
+          <a:lstStyle/>
+          <a:p>
+            <a:pPr indent="0" marL="0">
+              <a:lnSpc>
+                <a:spcPct val="125000"/>
+              </a:lnSpc>
+              <a:buNone/>
+            </a:pPr>
+            <a:r>
+              <a:rPr lang="en-US" sz="950" dirty="0">
+                <a:solidFill>
+                  <a:srgbClr val="6B7280"/>
+                </a:solidFill>
+                <a:latin typeface="Malgun Gothic" pitchFamily="34" charset="0"/>
+                <a:ea typeface="Malgun Gothic" pitchFamily="34" charset="-122"/>
+                <a:cs typeface="Malgun Gothic" pitchFamily="34" charset="-120"/>
+              </a:rPr>
+              <a:t>Python  ·  FastAPI  ·  React  ·  HL7 FHIR  ·  HAPI FHIR  ·  SUSHI / IG Publisher  ·  MariaDB  ·  MongoDB  ·  Redis  ·  Docker Compose  ·  XML</a:t>
+            </a:r>
+            <a:endParaRPr lang="en-US" sz="950" dirty="0"/>
+          </a:p>
+        </p:txBody>
+      </p:sp>
+      <p:sp>
+        <p:nvSpPr>
+          <p:cNvPr id="16" name="Text 13"/>
+          <p:cNvSpPr txBox="1"/>
+          <p:nvPr/>
+        </p:nvSpPr>
+        <p:spPr>
+          <a:xfrm>
+            <a:off x="548640" y="6473952"/>
+            <a:ext cx="3657600" cy="228600"/>
+          </a:xfrm>
+          <a:prstGeom prst="rect">
+            <a:avLst/>
+          </a:prstGeom>
+          <a:noFill/>
+          <a:ln/>
+        </p:spPr>
+        <p:txBody>
+          <a:bodyPr wrap="square" lIns="0" tIns="0" rIns="0" bIns="0" rtlCol="0" anchor="t"/>
+          <a:lstStyle/>
+          <a:p>
+            <a:pPr indent="0" marL="0">
+              <a:buNone/>
+            </a:pPr>
+            <a:r>
+              <a:rPr lang="en-US" sz="900" dirty="0">
+                <a:solidFill>
+                  <a:srgbClr val="6B7280"/>
+                </a:solidFill>
+                <a:latin typeface="Malgun Gothic" pitchFamily="34" charset="0"/>
+                <a:ea typeface="Malgun Gothic" pitchFamily="34" charset="-122"/>
+                <a:cs typeface="Malgun Gothic" pitchFamily="34" charset="-120"/>
+              </a:rPr>
+              <a:t>박동수 · Portfolio</a:t>
+            </a:r>
+            <a:endParaRPr lang="en-US" sz="900" dirty="0"/>
+          </a:p>
+        </p:txBody>
+      </p:sp>
+      <p:sp>
+        <p:nvSpPr>
+          <p:cNvPr id="17" name="Text 14"/>
+          <p:cNvSpPr txBox="1"/>
+          <p:nvPr/>
+        </p:nvSpPr>
+        <p:spPr>
+          <a:xfrm>
+            <a:off x="10728655" y="6473952"/>
+            <a:ext cx="914400" cy="228600"/>
+          </a:xfrm>
+          <a:prstGeom prst="rect">
+            <a:avLst/>
+          </a:prstGeom>
+          <a:noFill/>
+          <a:ln/>
+        </p:spPr>
+        <p:txBody>
+          <a:bodyPr wrap="square" lIns="0" tIns="0" rIns="0" bIns="0" rtlCol="0" anchor="t"/>
+          <a:lstStyle/>
+          <a:p>
+            <a:pPr algn="r" indent="0" marL="0">
+              <a:buNone/>
+            </a:pPr>
+            <a:r>
+              <a:rPr lang="en-US" sz="900" dirty="0">
+                <a:solidFill>
+                  <a:srgbClr val="6B7280"/>
+                </a:solidFill>
+                <a:latin typeface="Malgun Gothic" pitchFamily="34" charset="0"/>
+                <a:ea typeface="Malgun Gothic" pitchFamily="34" charset="-122"/>
+                <a:cs typeface="Malgun Gothic" pitchFamily="34" charset="-120"/>
+              </a:rPr>
+              <a:t>5</a:t>
+            </a:r>
+            <a:endParaRPr lang="en-US" sz="900" dirty="0"/>
+          </a:p>
+        </p:txBody>
+      </p:sp>
+    </p:spTree>
+  </p:cSld>
+  <p:clrMapOvr>
+    <a:masterClrMapping/>
+  </p:clrMapOvr>
+</p:sld>
+</file>
+
+<file path=ppt/slides/slide6.xml><?xml version="1.0" encoding="utf-8"?>
+<p:sld xmlns:a="http://schemas.openxmlformats.org/drawingml/2006/main" xmlns:r="http://schemas.openxmlformats.org/officeDocument/2006/relationships" xmlns:p="http://schemas.openxmlformats.org/presentationml/2006/main">
+  <p:cSld name="Slide 6">
+    <p:bg>
+      <p:bgPr>
+        <a:solidFill>
           <a:srgbClr val="14213D"/>
         </a:solidFill>
       </p:bgPr>
@@ -19054,7 +19871,7 @@
                 <a:ea typeface="Malgun Gothic" pitchFamily="34" charset="-122"/>
                 <a:cs typeface="Malgun Gothic" pitchFamily="34" charset="-120"/>
               </a:rPr>
-              <a:t>01</a:t>
+              <a:t>02</a:t>
             </a:r>
             <a:endParaRPr lang="en-US" sz="7200" dirty="0"/>
           </a:p>
@@ -19264,790 +20081,6 @@
               <a:rPr lang="en-US" sz="900" dirty="0">
                 <a:solidFill>
                   <a:srgbClr val="93A3C7"/>
-                </a:solidFill>
-                <a:latin typeface="Malgun Gothic" pitchFamily="34" charset="0"/>
-                <a:ea typeface="Malgun Gothic" pitchFamily="34" charset="-122"/>
-                <a:cs typeface="Malgun Gothic" pitchFamily="34" charset="-120"/>
-              </a:rPr>
-              <a:t>5</a:t>
-            </a:r>
-            <a:endParaRPr lang="en-US" sz="900" dirty="0"/>
-          </a:p>
-        </p:txBody>
-      </p:sp>
-    </p:spTree>
-  </p:cSld>
-  <p:clrMapOvr>
-    <a:masterClrMapping/>
-  </p:clrMapOvr>
-</p:sld>
-</file>
-
-<file path=ppt/slides/slide6.xml><?xml version="1.0" encoding="utf-8"?>
-<p:sld xmlns:a="http://schemas.openxmlformats.org/drawingml/2006/main" xmlns:r="http://schemas.openxmlformats.org/officeDocument/2006/relationships" xmlns:p="http://schemas.openxmlformats.org/presentationml/2006/main">
-  <p:cSld name="Slide 6">
-    <p:bg>
-      <p:bgPr>
-        <a:solidFill>
-          <a:srgbClr val="FFFFFF"/>
-        </a:solidFill>
-      </p:bgPr>
-    </p:bg>
-    <p:spTree>
-      <p:nvGrpSpPr>
-        <p:cNvPr id="1" name=""/>
-        <p:cNvGrpSpPr/>
-        <p:nvPr/>
-      </p:nvGrpSpPr>
-      <p:grpSpPr>
-        <a:xfrm>
-          <a:off x="0" y="0"/>
-          <a:ext cx="0" cy="0"/>
-          <a:chOff x="0" y="0"/>
-          <a:chExt cx="0" cy="0"/>
-        </a:xfrm>
-      </p:grpSpPr>
-      <p:sp>
-        <p:nvSpPr>
-          <p:cNvPr id="2" name="Text 0"/>
-          <p:cNvSpPr txBox="1"/>
-          <p:nvPr/>
-        </p:nvSpPr>
-        <p:spPr>
-          <a:xfrm>
-            <a:off x="548640" y="365760"/>
-            <a:ext cx="11094415" cy="274320"/>
-          </a:xfrm>
-          <a:prstGeom prst="rect">
-            <a:avLst/>
-          </a:prstGeom>
-          <a:noFill/>
-          <a:ln/>
-        </p:spPr>
-        <p:txBody>
-          <a:bodyPr wrap="square" lIns="0" tIns="0" rIns="0" bIns="0" rtlCol="0" anchor="t"/>
-          <a:lstStyle/>
-          <a:p>
-            <a:pPr indent="0" marL="0">
-              <a:buNone/>
-            </a:pPr>
-            <a:r>
-              <a:rPr lang="en-US" sz="1100" b="1" dirty="0">
-                <a:solidFill>
-                  <a:srgbClr val="1F6FE0"/>
-                </a:solidFill>
-                <a:latin typeface="Malgun Gothic" pitchFamily="34" charset="0"/>
-                <a:ea typeface="Malgun Gothic" pitchFamily="34" charset="-122"/>
-                <a:cs typeface="Malgun Gothic" pitchFamily="34" charset="-120"/>
-              </a:rPr>
-              <a:t>01  LLM 기반 의료 기록지 자동 생성 플랫폼</a:t>
-            </a:r>
-            <a:pPr indent="0" marL="0">
-              <a:buNone/>
-            </a:pPr>
-            <a:r>
-              <a:rPr lang="en-US" sz="1100" dirty="0">
-                <a:solidFill>
-                  <a:srgbClr val="6B7280"/>
-                </a:solidFill>
-                <a:latin typeface="Malgun Gothic" pitchFamily="34" charset="0"/>
-                <a:ea typeface="Malgun Gothic" pitchFamily="34" charset="-122"/>
-                <a:cs typeface="Malgun Gothic" pitchFamily="34" charset="-120"/>
-              </a:rPr>
-              <a:t>   ·   1 / 2</a:t>
-            </a:r>
-            <a:endParaRPr lang="en-US" sz="1100" dirty="0"/>
-          </a:p>
-        </p:txBody>
-      </p:sp>
-      <p:sp>
-        <p:nvSpPr>
-          <p:cNvPr id="3" name="Text 1"/>
-          <p:cNvSpPr txBox="1"/>
-          <p:nvPr/>
-        </p:nvSpPr>
-        <p:spPr>
-          <a:xfrm>
-            <a:off x="548640" y="658368"/>
-            <a:ext cx="11094415" cy="566928"/>
-          </a:xfrm>
-          <a:prstGeom prst="rect">
-            <a:avLst/>
-          </a:prstGeom>
-          <a:noFill/>
-          <a:ln/>
-        </p:spPr>
-        <p:txBody>
-          <a:bodyPr wrap="square" lIns="0" tIns="0" rIns="0" bIns="0" rtlCol="0" anchor="ctr"/>
-          <a:lstStyle/>
-          <a:p>
-            <a:pPr indent="0" marL="0">
-              <a:buNone/>
-            </a:pPr>
-            <a:r>
-              <a:rPr lang="en-US" sz="2200" b="1" dirty="0">
-                <a:solidFill>
-                  <a:srgbClr val="1A1D24"/>
-                </a:solidFill>
-                <a:latin typeface="Malgun Gothic" pitchFamily="34" charset="0"/>
-                <a:ea typeface="Malgun Gothic" pitchFamily="34" charset="-122"/>
-                <a:cs typeface="Malgun Gothic" pitchFamily="34" charset="-120"/>
-              </a:rPr>
-              <a:t>LLM 기반 의료 기록지 자동 생성 플랫폼 구축 · 운영</a:t>
-            </a:r>
-            <a:endParaRPr lang="en-US" sz="2200" dirty="0"/>
-          </a:p>
-        </p:txBody>
-      </p:sp>
-      <p:sp>
-        <p:nvSpPr>
-          <p:cNvPr id="4" name="Text 2"/>
-          <p:cNvSpPr txBox="1"/>
-          <p:nvPr/>
-        </p:nvSpPr>
-        <p:spPr>
-          <a:xfrm>
-            <a:off x="548640" y="1243584"/>
-            <a:ext cx="11094415" cy="274320"/>
-          </a:xfrm>
-          <a:prstGeom prst="rect">
-            <a:avLst/>
-          </a:prstGeom>
-          <a:noFill/>
-          <a:ln/>
-        </p:spPr>
-        <p:txBody>
-          <a:bodyPr wrap="square" lIns="0" tIns="0" rIns="0" bIns="0" rtlCol="0" anchor="t"/>
-          <a:lstStyle/>
-          <a:p>
-            <a:pPr indent="0" marL="0">
-              <a:buNone/>
-            </a:pPr>
-            <a:r>
-              <a:rPr lang="en-US" sz="1050" dirty="0">
-                <a:solidFill>
-                  <a:srgbClr val="6B7280"/>
-                </a:solidFill>
-                <a:latin typeface="Malgun Gothic" pitchFamily="34" charset="0"/>
-                <a:ea typeface="Malgun Gothic" pitchFamily="34" charset="-122"/>
-                <a:cs typeface="Malgun Gothic" pitchFamily="34" charset="-120"/>
-              </a:rPr>
-              <a:t>파이 디지털 헬스케어   ·   2024.05 ~ 2026.05      AI / LLM / Backend / Infra</a:t>
-            </a:r>
-            <a:endParaRPr lang="en-US" sz="1050" dirty="0"/>
-          </a:p>
-        </p:txBody>
-      </p:sp>
-      <p:sp>
-        <p:nvSpPr>
-          <p:cNvPr id="5" name="Text 3"/>
-          <p:cNvSpPr txBox="1"/>
-          <p:nvPr/>
-        </p:nvSpPr>
-        <p:spPr>
-          <a:xfrm>
-            <a:off x="548640" y="1645920"/>
-            <a:ext cx="6035040" cy="506095"/>
-          </a:xfrm>
-          <a:prstGeom prst="rect">
-            <a:avLst/>
-          </a:prstGeom>
-          <a:noFill/>
-          <a:ln/>
-        </p:spPr>
-        <p:txBody>
-          <a:bodyPr wrap="square" lIns="0" tIns="0" rIns="0" bIns="0" rtlCol="0" anchor="t"/>
-          <a:lstStyle/>
-          <a:p>
-            <a:pPr indent="0" marL="0">
-              <a:lnSpc>
-                <a:spcPct val="135000"/>
-              </a:lnSpc>
-              <a:buNone/>
-            </a:pPr>
-            <a:r>
-              <a:rPr lang="en-US" sz="1250" b="1" dirty="0">
-                <a:solidFill>
-                  <a:srgbClr val="1F6FE0"/>
-                </a:solidFill>
-                <a:latin typeface="Malgun Gothic" pitchFamily="34" charset="0"/>
-                <a:ea typeface="Malgun Gothic" pitchFamily="34" charset="-122"/>
-                <a:cs typeface="Malgun Gothic" pitchFamily="34" charset="-120"/>
-              </a:rPr>
-              <a:t>요약  </a:t>
-            </a:r>
-            <a:pPr indent="0" marL="0">
-              <a:lnSpc>
-                <a:spcPct val="135000"/>
-              </a:lnSpc>
-              <a:buNone/>
-            </a:pPr>
-            <a:r>
-              <a:rPr lang="en-US" sz="1250" b="1" dirty="0">
-                <a:solidFill>
-                  <a:srgbClr val="1A1D24"/>
-                </a:solidFill>
-                <a:latin typeface="Malgun Gothic" pitchFamily="34" charset="0"/>
-                <a:ea typeface="Malgun Gothic" pitchFamily="34" charset="-122"/>
-                <a:cs typeface="Malgun Gothic" pitchFamily="34" charset="-120"/>
-              </a:rPr>
-              <a:t>환자 기록을 읽은 AI가 의료 서식 초안을 대신 써 주는 서비스의 뼈대(서버와 데이터 흐름)를 설계하고 개발했습니다.</a:t>
-            </a:r>
-            <a:endParaRPr lang="en-US" sz="1250" dirty="0"/>
-          </a:p>
-        </p:txBody>
-      </p:sp>
-      <p:sp>
-        <p:nvSpPr>
-          <p:cNvPr id="6" name="Text 4"/>
-          <p:cNvSpPr txBox="1"/>
-          <p:nvPr/>
-        </p:nvSpPr>
-        <p:spPr>
-          <a:xfrm>
-            <a:off x="548640" y="2261743"/>
-            <a:ext cx="6035040" cy="506095"/>
-          </a:xfrm>
-          <a:prstGeom prst="rect">
-            <a:avLst/>
-          </a:prstGeom>
-          <a:noFill/>
-          <a:ln/>
-        </p:spPr>
-        <p:txBody>
-          <a:bodyPr wrap="square" lIns="0" tIns="0" rIns="0" bIns="0" rtlCol="0" anchor="t"/>
-          <a:lstStyle/>
-          <a:p>
-            <a:pPr indent="0" marL="0">
-              <a:lnSpc>
-                <a:spcPct val="135000"/>
-              </a:lnSpc>
-              <a:buNone/>
-            </a:pPr>
-            <a:r>
-              <a:rPr lang="en-US" sz="1250" dirty="0">
-                <a:solidFill>
-                  <a:srgbClr val="444B57"/>
-                </a:solidFill>
-                <a:latin typeface="Malgun Gothic" pitchFamily="34" charset="0"/>
-                <a:ea typeface="Malgun Gothic" pitchFamily="34" charset="-122"/>
-                <a:cs typeface="Malgun Gothic" pitchFamily="34" charset="-120"/>
-              </a:rPr>
-              <a:t>EMR 데이터를 FHIR로 표준화하고 LLM으로 의료 기록 서식을 자동 생성하는 플랫폼의 아키텍처·인프라·백엔드를 담당.</a:t>
-            </a:r>
-            <a:endParaRPr lang="en-US" sz="1250" dirty="0"/>
-          </a:p>
-        </p:txBody>
-      </p:sp>
-      <p:sp>
-        <p:nvSpPr>
-          <p:cNvPr id="7" name="Shape 5"/>
-          <p:cNvSpPr/>
-          <p:nvPr/>
-        </p:nvSpPr>
-        <p:spPr>
-          <a:xfrm>
-            <a:off x="548640" y="2904998"/>
-            <a:ext cx="6035040" cy="1691640"/>
-          </a:xfrm>
-          <a:prstGeom prst="roundRect">
-            <a:avLst>
-              <a:gd name="adj" fmla="val 4324"/>
-            </a:avLst>
-          </a:prstGeom>
-          <a:solidFill>
-            <a:srgbClr val="F4F6F9"/>
-          </a:solidFill>
-          <a:ln w="12700">
-            <a:solidFill>
-              <a:srgbClr val="E3E6EB"/>
-            </a:solidFill>
-            <a:prstDash val="solid"/>
-          </a:ln>
-        </p:spPr>
-      </p:sp>
-      <p:sp>
-        <p:nvSpPr>
-          <p:cNvPr id="8" name="Text 6"/>
-          <p:cNvSpPr txBox="1"/>
-          <p:nvPr/>
-        </p:nvSpPr>
-        <p:spPr>
-          <a:xfrm>
-            <a:off x="822960" y="3042158"/>
-            <a:ext cx="5486400" cy="1463040"/>
-          </a:xfrm>
-          <a:prstGeom prst="rect">
-            <a:avLst/>
-          </a:prstGeom>
-          <a:noFill/>
-          <a:ln/>
-        </p:spPr>
-        <p:txBody>
-          <a:bodyPr wrap="square" lIns="0" tIns="0" rIns="0" bIns="0" rtlCol="0" anchor="t"/>
-          <a:lstStyle/>
-          <a:p>
-            <a:pPr indent="0" marL="0">
-              <a:lnSpc>
-                <a:spcPct val="135000"/>
-              </a:lnSpc>
-              <a:spcAft>
-                <a:spcPts val="600"/>
-              </a:spcAft>
-              <a:buNone/>
-            </a:pPr>
-            <a:r>
-              <a:rPr lang="en-US" sz="1200" dirty="0">
-                <a:solidFill>
-                  <a:srgbClr val="444B57"/>
-                </a:solidFill>
-                <a:latin typeface="Malgun Gothic" pitchFamily="34" charset="0"/>
-                <a:ea typeface="Malgun Gothic" pitchFamily="34" charset="-122"/>
-                <a:cs typeface="Malgun Gothic" pitchFamily="34" charset="-120"/>
-              </a:rPr>
-              <a:t>의료 분야 LLM을 실제 EMR에 연동해 현장 업무에 활용한 국내 최초 사례입니다. 이미 효율적으로 돌아가던 진료 업무 사이에서 '서식 작성'이라는 키워드를 잡아 업무 효율을 높이자는 제안으로 병원의 승인을 받았고, 4개월 만에 개발을 마쳐 운영을 시작했습니다.</a:t>
-            </a:r>
-            <a:endParaRPr lang="en-US" sz="1200" dirty="0"/>
-          </a:p>
-          <a:p>
-            <a:pPr indent="0" marL="0">
-              <a:lnSpc>
-                <a:spcPct val="135000"/>
-              </a:lnSpc>
-              <a:spcAft>
-                <a:spcPts val="600"/>
-              </a:spcAft>
-              <a:buNone/>
-            </a:pPr>
-            <a:r>
-              <a:rPr lang="en-US" sz="1200" dirty="0">
-                <a:solidFill>
-                  <a:srgbClr val="444B57"/>
-                </a:solidFill>
-                <a:latin typeface="Malgun Gothic" pitchFamily="34" charset="0"/>
-                <a:ea typeface="Malgun Gothic" pitchFamily="34" charset="-122"/>
-                <a:cs typeface="Malgun Gothic" pitchFamily="34" charset="-120"/>
-              </a:rPr>
-              <a:t>폐쇄망 환경에서 모델 업체와 협업해 학습을 진행하고 오픈 모델도 함께 활용하면서, LLM 서빙과 운영 전반에 대한 경험을 쌓았습니다.</a:t>
-            </a:r>
-            <a:endParaRPr lang="en-US" sz="1200" dirty="0"/>
-          </a:p>
-        </p:txBody>
-      </p:sp>
-      <p:pic>
-        <p:nvPicPr>
-          <p:cNvPr id="9" name="Image 0" descr="/home/user/portfolio/assets/images/projects/llm-record-process-1.jpg">    </p:cNvPr>
-          <p:cNvPicPr>
-            <a:picLocks noChangeAspect="1"/>
-          </p:cNvPicPr>
-          <p:nvPr/>
-        </p:nvPicPr>
-        <p:blipFill>
-          <a:blip r:embed="rId1"/>
-          <a:stretch>
-            <a:fillRect/>
-          </a:stretch>
-        </p:blipFill>
-        <p:spPr>
-          <a:xfrm>
-            <a:off x="6995160" y="1645920"/>
-            <a:ext cx="4073403" cy="1945050"/>
-          </a:xfrm>
-          <a:prstGeom prst="rect">
-            <a:avLst/>
-          </a:prstGeom>
-        </p:spPr>
-      </p:pic>
-      <p:sp>
-        <p:nvSpPr>
-          <p:cNvPr id="10" name="Text 7"/>
-          <p:cNvSpPr txBox="1"/>
-          <p:nvPr/>
-        </p:nvSpPr>
-        <p:spPr>
-          <a:xfrm>
-            <a:off x="6995160" y="3773850"/>
-            <a:ext cx="4647895" cy="256032"/>
-          </a:xfrm>
-          <a:prstGeom prst="rect">
-            <a:avLst/>
-          </a:prstGeom>
-          <a:noFill/>
-          <a:ln/>
-        </p:spPr>
-        <p:txBody>
-          <a:bodyPr wrap="square" lIns="0" tIns="0" rIns="0" bIns="0" rtlCol="0" anchor="t"/>
-          <a:lstStyle/>
-          <a:p>
-            <a:pPr indent="0" marL="0">
-              <a:buNone/>
-            </a:pPr>
-            <a:r>
-              <a:rPr lang="en-US" sz="950" b="1" spc="200" kern="0" dirty="0">
-                <a:solidFill>
-                  <a:srgbClr val="1F6FE0"/>
-                </a:solidFill>
-                <a:latin typeface="Malgun Gothic" pitchFamily="34" charset="0"/>
-                <a:ea typeface="Malgun Gothic" pitchFamily="34" charset="-122"/>
-                <a:cs typeface="Malgun Gothic" pitchFamily="34" charset="-120"/>
-              </a:rPr>
-              <a:t>역할 · 수행 내용</a:t>
-            </a:r>
-            <a:endParaRPr lang="en-US" sz="950" dirty="0"/>
-          </a:p>
-        </p:txBody>
-      </p:sp>
-      <p:sp>
-        <p:nvSpPr>
-          <p:cNvPr id="11" name="Text 8"/>
-          <p:cNvSpPr txBox="1"/>
-          <p:nvPr/>
-        </p:nvSpPr>
-        <p:spPr>
-          <a:xfrm>
-            <a:off x="6995160" y="4048170"/>
-            <a:ext cx="4647895" cy="1149858"/>
-          </a:xfrm>
-          <a:prstGeom prst="rect">
-            <a:avLst/>
-          </a:prstGeom>
-          <a:noFill/>
-          <a:ln/>
-        </p:spPr>
-        <p:txBody>
-          <a:bodyPr wrap="square" lIns="0" tIns="0" rIns="0" bIns="0" rtlCol="0" anchor="t"/>
-          <a:lstStyle/>
-          <a:p>
-            <a:pPr marL="152400" indent="-152400">
-              <a:lnSpc>
-                <a:spcPct val="130000"/>
-              </a:lnSpc>
-              <a:spcAft>
-                <a:spcPts val="400"/>
-              </a:spcAft>
-              <a:buSzPct val="100000"/>
-              <a:buChar char="•"/>
-            </a:pPr>
-            <a:r>
-              <a:rPr lang="en-US" sz="900" dirty="0">
-                <a:solidFill>
-                  <a:srgbClr val="1A1D24"/>
-                </a:solidFill>
-                <a:latin typeface="Malgun Gothic" pitchFamily="34" charset="0"/>
-                <a:ea typeface="Malgun Gothic" pitchFamily="34" charset="-122"/>
-                <a:cs typeface="Malgun Gothic" pitchFamily="34" charset="-120"/>
-              </a:rPr>
-              <a:t>EMR → 게이트웨이 → 데이터 표준화 → 전처리 → LLM → 후처리로 이어지는 데이터 파이프라인 설계</a:t>
-            </a:r>
-            <a:endParaRPr lang="en-US" sz="900" dirty="0"/>
-          </a:p>
-          <a:p>
-            <a:pPr marL="152400" indent="-152400">
-              <a:lnSpc>
-                <a:spcPct val="130000"/>
-              </a:lnSpc>
-              <a:spcAft>
-                <a:spcPts val="400"/>
-              </a:spcAft>
-              <a:buSzPct val="100000"/>
-              <a:buChar char="•"/>
-            </a:pPr>
-            <a:r>
-              <a:rPr lang="en-US" sz="900" dirty="0">
-                <a:solidFill>
-                  <a:srgbClr val="1A1D24"/>
-                </a:solidFill>
-                <a:latin typeface="Malgun Gothic" pitchFamily="34" charset="0"/>
-                <a:ea typeface="Malgun Gothic" pitchFamily="34" charset="-122"/>
-                <a:cs typeface="Malgun Gothic" pitchFamily="34" charset="-120"/>
-              </a:rPr>
-              <a:t>서비스별 단일 컨테이너 구조에서 멀티 컨테이너(Nginx, MSA 기반 Scaling) 구조로 확장 설계</a:t>
-            </a:r>
-            <a:endParaRPr lang="en-US" sz="900" dirty="0"/>
-          </a:p>
-          <a:p>
-            <a:pPr marL="152400" indent="-152400">
-              <a:lnSpc>
-                <a:spcPct val="130000"/>
-              </a:lnSpc>
-              <a:spcAft>
-                <a:spcPts val="400"/>
-              </a:spcAft>
-              <a:buSzPct val="100000"/>
-              <a:buChar char="•"/>
-            </a:pPr>
-            <a:r>
-              <a:rPr lang="en-US" sz="900" dirty="0">
-                <a:solidFill>
-                  <a:srgbClr val="1A1D24"/>
-                </a:solidFill>
-                <a:latin typeface="Malgun Gothic" pitchFamily="34" charset="0"/>
-                <a:ea typeface="Malgun Gothic" pitchFamily="34" charset="-122"/>
-                <a:cs typeface="Malgun Gothic" pitchFamily="34" charset="-120"/>
-              </a:rPr>
-              <a:t>스트레스 테스트, 보안 취약점 점검 대응 및 로깅·모니터링 기반 vLLM 추론 성능·시스템 개선 수행</a:t>
-            </a:r>
-            <a:endParaRPr lang="en-US" sz="900" dirty="0"/>
-          </a:p>
-        </p:txBody>
-      </p:sp>
-      <p:sp>
-        <p:nvSpPr>
-          <p:cNvPr id="12" name="Text 9"/>
-          <p:cNvSpPr txBox="1"/>
-          <p:nvPr/>
-        </p:nvSpPr>
-        <p:spPr>
-          <a:xfrm>
-            <a:off x="6995160" y="5362620"/>
-            <a:ext cx="4647895" cy="256032"/>
-          </a:xfrm>
-          <a:prstGeom prst="rect">
-            <a:avLst/>
-          </a:prstGeom>
-          <a:noFill/>
-          <a:ln/>
-        </p:spPr>
-        <p:txBody>
-          <a:bodyPr wrap="square" lIns="0" tIns="0" rIns="0" bIns="0" rtlCol="0" anchor="t"/>
-          <a:lstStyle/>
-          <a:p>
-            <a:pPr indent="0" marL="0">
-              <a:buNone/>
-            </a:pPr>
-            <a:r>
-              <a:rPr lang="en-US" sz="950" b="1" spc="200" kern="0" dirty="0">
-                <a:solidFill>
-                  <a:srgbClr val="1F6FE0"/>
-                </a:solidFill>
-                <a:latin typeface="Malgun Gothic" pitchFamily="34" charset="0"/>
-                <a:ea typeface="Malgun Gothic" pitchFamily="34" charset="-122"/>
-                <a:cs typeface="Malgun Gothic" pitchFamily="34" charset="-120"/>
-              </a:rPr>
-              <a:t>주요 성과 · 포인트</a:t>
-            </a:r>
-            <a:endParaRPr lang="en-US" sz="950" dirty="0"/>
-          </a:p>
-        </p:txBody>
-      </p:sp>
-      <p:sp>
-        <p:nvSpPr>
-          <p:cNvPr id="13" name="Text 10"/>
-          <p:cNvSpPr txBox="1"/>
-          <p:nvPr/>
-        </p:nvSpPr>
-        <p:spPr>
-          <a:xfrm>
-            <a:off x="6995160" y="5636940"/>
-            <a:ext cx="4647895" cy="597789"/>
-          </a:xfrm>
-          <a:prstGeom prst="rect">
-            <a:avLst/>
-          </a:prstGeom>
-          <a:noFill/>
-          <a:ln/>
-        </p:spPr>
-        <p:txBody>
-          <a:bodyPr wrap="square" lIns="0" tIns="0" rIns="0" bIns="0" rtlCol="0" anchor="t"/>
-          <a:lstStyle/>
-          <a:p>
-            <a:pPr marL="152400" indent="-152400">
-              <a:lnSpc>
-                <a:spcPct val="130000"/>
-              </a:lnSpc>
-              <a:spcAft>
-                <a:spcPts val="400"/>
-              </a:spcAft>
-              <a:buSzPct val="100000"/>
-              <a:buChar char="•"/>
-            </a:pPr>
-            <a:r>
-              <a:rPr lang="en-US" sz="900" dirty="0">
-                <a:solidFill>
-                  <a:srgbClr val="1A1D24"/>
-                </a:solidFill>
-                <a:latin typeface="Malgun Gothic" pitchFamily="34" charset="0"/>
-                <a:ea typeface="Malgun Gothic" pitchFamily="34" charset="-122"/>
-                <a:cs typeface="Malgun Gothic" pitchFamily="34" charset="-120"/>
-              </a:rPr>
-              <a:t>세브란스 3개 병원에 5종 서식, 1개 병원에 1종 서식 적용 (운영 배포)</a:t>
-            </a:r>
-            <a:endParaRPr lang="en-US" sz="900" dirty="0"/>
-          </a:p>
-          <a:p>
-            <a:pPr marL="152400" indent="-152400">
-              <a:lnSpc>
-                <a:spcPct val="130000"/>
-              </a:lnSpc>
-              <a:spcAft>
-                <a:spcPts val="400"/>
-              </a:spcAft>
-              <a:buSzPct val="100000"/>
-              <a:buChar char="•"/>
-            </a:pPr>
-            <a:r>
-              <a:rPr lang="en-US" sz="900" dirty="0">
-                <a:solidFill>
-                  <a:srgbClr val="1A1D24"/>
-                </a:solidFill>
-                <a:latin typeface="Malgun Gothic" pitchFamily="34" charset="0"/>
-                <a:ea typeface="Malgun Gothic" pitchFamily="34" charset="-122"/>
-                <a:cs typeface="Malgun Gothic" pitchFamily="34" charset="-120"/>
-              </a:rPr>
-              <a:t>실제 병원 업무에 LLM을 적용하고 운영하며 AI 서비스의 개발·운영 경험을 축적</a:t>
-            </a:r>
-            <a:endParaRPr lang="en-US" sz="900" dirty="0"/>
-          </a:p>
-        </p:txBody>
-      </p:sp>
-      <p:sp>
-        <p:nvSpPr>
-          <p:cNvPr id="14" name="Text 11"/>
-          <p:cNvSpPr txBox="1"/>
-          <p:nvPr/>
-        </p:nvSpPr>
-        <p:spPr>
-          <a:xfrm>
-            <a:off x="548640" y="5555171"/>
-            <a:ext cx="6035040" cy="237744"/>
-          </a:xfrm>
-          <a:prstGeom prst="rect">
-            <a:avLst/>
-          </a:prstGeom>
-          <a:noFill/>
-          <a:ln/>
-        </p:spPr>
-        <p:txBody>
-          <a:bodyPr wrap="square" lIns="0" tIns="0" rIns="0" bIns="0" rtlCol="0" anchor="t"/>
-          <a:lstStyle/>
-          <a:p>
-            <a:pPr indent="0" marL="0">
-              <a:buNone/>
-            </a:pPr>
-            <a:r>
-              <a:rPr lang="en-US" sz="950" b="1" spc="200" kern="0" dirty="0">
-                <a:solidFill>
-                  <a:srgbClr val="1F6FE0"/>
-                </a:solidFill>
-                <a:latin typeface="Malgun Gothic" pitchFamily="34" charset="0"/>
-                <a:ea typeface="Malgun Gothic" pitchFamily="34" charset="-122"/>
-                <a:cs typeface="Malgun Gothic" pitchFamily="34" charset="-120"/>
-              </a:rPr>
-              <a:t>연관 기술</a:t>
-            </a:r>
-            <a:endParaRPr lang="en-US" sz="950" dirty="0"/>
-          </a:p>
-        </p:txBody>
-      </p:sp>
-      <p:sp>
-        <p:nvSpPr>
-          <p:cNvPr id="15" name="Text 12"/>
-          <p:cNvSpPr txBox="1"/>
-          <p:nvPr/>
-        </p:nvSpPr>
-        <p:spPr>
-          <a:xfrm>
-            <a:off x="548640" y="5811203"/>
-            <a:ext cx="6035040" cy="543878"/>
-          </a:xfrm>
-          <a:prstGeom prst="rect">
-            <a:avLst/>
-          </a:prstGeom>
-          <a:noFill/>
-          <a:ln/>
-        </p:spPr>
-        <p:txBody>
-          <a:bodyPr wrap="square" lIns="0" tIns="0" rIns="0" bIns="0" rtlCol="0" anchor="t"/>
-          <a:lstStyle/>
-          <a:p>
-            <a:pPr indent="0" marL="0">
-              <a:lnSpc>
-                <a:spcPct val="125000"/>
-              </a:lnSpc>
-              <a:buNone/>
-            </a:pPr>
-            <a:r>
-              <a:rPr lang="en-US" sz="950" dirty="0">
-                <a:solidFill>
-                  <a:srgbClr val="6B7280"/>
-                </a:solidFill>
-                <a:latin typeface="Malgun Gothic" pitchFamily="34" charset="0"/>
-                <a:ea typeface="Malgun Gothic" pitchFamily="34" charset="-122"/>
-                <a:cs typeface="Malgun Gothic" pitchFamily="34" charset="-120"/>
-              </a:rPr>
-              <a:t>Python  ·  FastAPI  ·  vLLM  ·  Docker  ·  Nginx  ·  Redis  ·  PostgreSQL  ·  MongoDB  ·  Elasticsearch  ·  HL7 FHIR  ·  Grafana</a:t>
-            </a:r>
-            <a:endParaRPr lang="en-US" sz="950" dirty="0"/>
-          </a:p>
-        </p:txBody>
-      </p:sp>
-      <p:sp>
-        <p:nvSpPr>
-          <p:cNvPr id="16" name="Text 13"/>
-          <p:cNvSpPr txBox="1"/>
-          <p:nvPr/>
-        </p:nvSpPr>
-        <p:spPr>
-          <a:xfrm>
-            <a:off x="548640" y="6473952"/>
-            <a:ext cx="3657600" cy="228600"/>
-          </a:xfrm>
-          <a:prstGeom prst="rect">
-            <a:avLst/>
-          </a:prstGeom>
-          <a:noFill/>
-          <a:ln/>
-        </p:spPr>
-        <p:txBody>
-          <a:bodyPr wrap="square" lIns="0" tIns="0" rIns="0" bIns="0" rtlCol="0" anchor="t"/>
-          <a:lstStyle/>
-          <a:p>
-            <a:pPr indent="0" marL="0">
-              <a:buNone/>
-            </a:pPr>
-            <a:r>
-              <a:rPr lang="en-US" sz="900" dirty="0">
-                <a:solidFill>
-                  <a:srgbClr val="6B7280"/>
-                </a:solidFill>
-                <a:latin typeface="Malgun Gothic" pitchFamily="34" charset="0"/>
-                <a:ea typeface="Malgun Gothic" pitchFamily="34" charset="-122"/>
-                <a:cs typeface="Malgun Gothic" pitchFamily="34" charset="-120"/>
-              </a:rPr>
-              <a:t>박동수 · Portfolio</a:t>
-            </a:r>
-            <a:endParaRPr lang="en-US" sz="900" dirty="0"/>
-          </a:p>
-        </p:txBody>
-      </p:sp>
-      <p:sp>
-        <p:nvSpPr>
-          <p:cNvPr id="17" name="Text 14"/>
-          <p:cNvSpPr txBox="1"/>
-          <p:nvPr/>
-        </p:nvSpPr>
-        <p:spPr>
-          <a:xfrm>
-            <a:off x="10728655" y="6473952"/>
-            <a:ext cx="914400" cy="228600"/>
-          </a:xfrm>
-          <a:prstGeom prst="rect">
-            <a:avLst/>
-          </a:prstGeom>
-          <a:noFill/>
-          <a:ln/>
-        </p:spPr>
-        <p:txBody>
-          <a:bodyPr wrap="square" lIns="0" tIns="0" rIns="0" bIns="0" rtlCol="0" anchor="t"/>
-          <a:lstStyle/>
-          <a:p>
-            <a:pPr algn="r" indent="0" marL="0">
-              <a:buNone/>
-            </a:pPr>
-            <a:r>
-              <a:rPr lang="en-US" sz="900" dirty="0">
-                <a:solidFill>
-                  <a:srgbClr val="6B7280"/>
                 </a:solidFill>
                 <a:latin typeface="Malgun Gothic" pitchFamily="34" charset="0"/>
                 <a:ea typeface="Malgun Gothic" pitchFamily="34" charset="-122"/>
@@ -20124,7 +20157,7 @@
                 <a:ea typeface="Malgun Gothic" pitchFamily="34" charset="-122"/>
                 <a:cs typeface="Malgun Gothic" pitchFamily="34" charset="-120"/>
               </a:rPr>
-              <a:t>01  LLM 기반 의료 기록지 자동 생성 플랫폼</a:t>
+              <a:t>02  LLM 기반 의료 기록지 자동 생성 플랫폼</a:t>
             </a:r>
             <a:pPr indent="0" marL="0">
               <a:buNone/>
@@ -20138,7 +20171,7 @@
                 <a:ea typeface="Malgun Gothic" pitchFamily="34" charset="-122"/>
                 <a:cs typeface="Malgun Gothic" pitchFamily="34" charset="-120"/>
               </a:rPr>
-              <a:t>   ·   2 / 2</a:t>
+              <a:t>   ·   1 / 2</a:t>
             </a:r>
             <a:endParaRPr lang="en-US" sz="1100" dirty="0"/>
           </a:p>
@@ -20177,7 +20210,7 @@
                 <a:ea typeface="Malgun Gothic" pitchFamily="34" charset="-122"/>
                 <a:cs typeface="Malgun Gothic" pitchFamily="34" charset="-120"/>
               </a:rPr>
-              <a:t>서식 생성 파이프라인 AI Agent 고도화 및 확장 사업</a:t>
+              <a:t>LLM 기반 의료 기록지 자동 생성 플랫폼 구축 · 운영</a:t>
             </a:r>
             <a:endParaRPr lang="en-US" sz="2200" dirty="0"/>
           </a:p>
@@ -20216,7 +20249,7 @@
                 <a:ea typeface="Malgun Gothic" pitchFamily="34" charset="-122"/>
                 <a:cs typeface="Malgun Gothic" pitchFamily="34" charset="-120"/>
               </a:rPr>
-              <a:t>파이 디지털 헬스케어   ·   2026.06 ~ 현재      AI / LLM / Backend / Monitoring</a:t>
+              <a:t>파이 디지털 헬스케어   ·   2024.05 ~ 2026.05      AI / LLM / Backend / Infra</a:t>
             </a:r>
             <a:endParaRPr lang="en-US" sz="1050" dirty="0"/>
           </a:p>
@@ -20231,7 +20264,7 @@
         <p:spPr>
           <a:xfrm>
             <a:off x="548640" y="1645920"/>
-            <a:ext cx="6766560" cy="506095"/>
+            <a:ext cx="6035040" cy="506095"/>
           </a:xfrm>
           <a:prstGeom prst="rect">
             <a:avLst/>
@@ -20275,7 +20308,7 @@
                 <a:ea typeface="Malgun Gothic" pitchFamily="34" charset="-122"/>
                 <a:cs typeface="Malgun Gothic" pitchFamily="34" charset="-120"/>
               </a:rPr>
-              <a:t>서식 생성 파이프라인을 AI Agent 구조로 다시 설계해 확장하기 쉽게 만들고, 검진 데이터·OCR 연동을 병행했습니다.</a:t>
+              <a:t>환자 기록을 읽은 AI가 의료 서식 초안을 대신 써 주는 서비스의 뼈대(서버와 데이터 흐름)를 설계하고 개발했습니다.</a:t>
             </a:r>
             <a:endParaRPr lang="en-US" sz="1250" dirty="0"/>
           </a:p>
@@ -20290,7 +20323,7 @@
         <p:spPr>
           <a:xfrm>
             <a:off x="548640" y="2261743"/>
-            <a:ext cx="6766560" cy="506095"/>
+            <a:ext cx="6035040" cy="506095"/>
           </a:xfrm>
           <a:prstGeom prst="rect">
             <a:avLst/>
@@ -20317,7 +20350,7 @@
                 <a:ea typeface="Malgun Gothic" pitchFamily="34" charset="-122"/>
                 <a:cs typeface="Malgun Gothic" pitchFamily="34" charset="-120"/>
               </a:rPr>
-              <a:t>늘어나는 전·후처리 요구사항에 대응하기 위해 서식 생성 파이프라인을 Kafka + AI Agent 구조로 재설계하고, 검진 데이터·OCR 연동 등 확장 사업을 병행.</a:t>
+              <a:t>EMR 데이터를 FHIR로 표준화하고 LLM으로 의료 기록 서식을 자동 생성하는 플랫폼의 아키텍처·인프라·백엔드를 담당.</a:t>
             </a:r>
             <a:endParaRPr lang="en-US" sz="1250" dirty="0"/>
           </a:p>
@@ -20332,7 +20365,7 @@
         <p:spPr>
           <a:xfrm>
             <a:off x="548640" y="2904998"/>
-            <a:ext cx="6766560" cy="1691640"/>
+            <a:ext cx="6035040" cy="1691640"/>
           </a:xfrm>
           <a:prstGeom prst="roundRect">
             <a:avLst>
@@ -20359,7 +20392,7 @@
         <p:spPr>
           <a:xfrm>
             <a:off x="822960" y="3042158"/>
-            <a:ext cx="6217920" cy="1463040"/>
+            <a:ext cx="5486400" cy="1463040"/>
           </a:xfrm>
           <a:prstGeom prst="rect">
             <a:avLst/>
@@ -20389,7 +20422,7 @@
                 <a:ea typeface="Malgun Gothic" pitchFamily="34" charset="-122"/>
                 <a:cs typeface="Malgun Gothic" pitchFamily="34" charset="-120"/>
               </a:rPr>
-              <a:t>서식 작성에 대한 요구사항이 늘어나면서 전·후처리 항목이 계속 추가되었고 코드도 점점 복잡해져, 2026년부터 서식 생성 파이프라인을 AI Agent 구조로 고도화하기로 결정했습니다.</a:t>
+              <a:t>의료 분야 LLM을 실제 EMR에 연동해 현장 업무에 활용한 국내 최초 사례입니다. 이미 효율적으로 돌아가던 진료 업무 사이에서 '서식 작성'이라는 키워드를 잡아 업무 효율을 높이자는 제안으로 병원의 승인을 받았고, 4개월 만에 개발을 마쳐 운영을 시작했습니다.</a:t>
             </a:r>
             <a:endParaRPr lang="en-US" sz="1200" dirty="0"/>
           </a:p>
@@ -20412,22 +20445,46 @@
                 <a:ea typeface="Malgun Gothic" pitchFamily="34" charset="-122"/>
                 <a:cs typeface="Malgun Gothic" pitchFamily="34" charset="-120"/>
               </a:rPr>
-              <a:t>전·후처리 영역을 Tool 단위로 나누어 구분하고, 이후 일부 판단 영역은 Agent에게 맡길 수 있도록 구조를 잡았습니다. 이 과정에서 검진 데이터, OCR 연동 같은 확장 포인트를 찾아 세브란스와 신규 계약을 진행했습니다.</a:t>
+              <a:t>폐쇄망 환경에서 모델 업체와 협업해 학습을 진행하고 오픈 모델도 함께 활용하면서, LLM 서빙과 운영 전반에 대한 경험을 쌓았습니다.</a:t>
             </a:r>
             <a:endParaRPr lang="en-US" sz="1200" dirty="0"/>
           </a:p>
         </p:txBody>
       </p:sp>
-      <p:sp>
-        <p:nvSpPr>
-          <p:cNvPr id="9" name="Text 7"/>
-          <p:cNvSpPr txBox="1"/>
-          <p:nvPr/>
-        </p:nvSpPr>
-        <p:spPr>
-          <a:xfrm>
-            <a:off x="7726680" y="1645920"/>
-            <a:ext cx="3916375" cy="256032"/>
+      <p:pic>
+        <p:nvPicPr>
+          <p:cNvPr id="9" name="Image 0" descr="/home/user/portfolio/assets/images/projects/llm-record-process-1.jpg">    </p:cNvPr>
+          <p:cNvPicPr>
+            <a:picLocks noChangeAspect="1"/>
+          </p:cNvPicPr>
+          <p:nvPr/>
+        </p:nvPicPr>
+        <p:blipFill>
+          <a:blip r:embed="rId1"/>
+          <a:stretch>
+            <a:fillRect/>
+          </a:stretch>
+        </p:blipFill>
+        <p:spPr>
+          <a:xfrm>
+            <a:off x="6995160" y="1645920"/>
+            <a:ext cx="4073403" cy="1945050"/>
+          </a:xfrm>
+          <a:prstGeom prst="rect">
+            <a:avLst/>
+          </a:prstGeom>
+        </p:spPr>
+      </p:pic>
+      <p:sp>
+        <p:nvSpPr>
+          <p:cNvPr id="10" name="Text 7"/>
+          <p:cNvSpPr txBox="1"/>
+          <p:nvPr/>
+        </p:nvSpPr>
+        <p:spPr>
+          <a:xfrm>
+            <a:off x="6995160" y="3773850"/>
+            <a:ext cx="4647895" cy="256032"/>
           </a:xfrm>
           <a:prstGeom prst="rect">
             <a:avLst/>
@@ -20459,14 +20516,14 @@
       </p:sp>
       <p:sp>
         <p:nvSpPr>
-          <p:cNvPr id="10" name="Text 8"/>
-          <p:cNvSpPr txBox="1"/>
-          <p:nvPr/>
-        </p:nvSpPr>
-        <p:spPr>
-          <a:xfrm>
-            <a:off x="7726680" y="1920240"/>
-            <a:ext cx="3916375" cy="2116265"/>
+          <p:cNvPr id="11" name="Text 8"/>
+          <p:cNvSpPr txBox="1"/>
+          <p:nvPr/>
+        </p:nvSpPr>
+        <p:spPr>
+          <a:xfrm>
+            <a:off x="6995160" y="4048170"/>
+            <a:ext cx="4647895" cy="1149858"/>
           </a:xfrm>
           <a:prstGeom prst="rect">
             <a:avLst/>
@@ -20489,7 +20546,7 @@
               <a:buChar char="•"/>
             </a:pPr>
             <a:r>
-              <a:rPr lang="en-US" sz="1150" dirty="0">
+              <a:rPr lang="en-US" sz="900" dirty="0">
                 <a:solidFill>
                   <a:srgbClr val="1A1D24"/>
                 </a:solidFill>
@@ -20497,9 +20554,9 @@
                 <a:ea typeface="Malgun Gothic" pitchFamily="34" charset="-122"/>
                 <a:cs typeface="Malgun Gothic" pitchFamily="34" charset="-120"/>
               </a:rPr>
-              <a:t>AI Agent 고도화: 서식 생성 파이프라인을 Kafka + AI Agent 구조로 재설계하고, 확장을 고려해 Tool을 MCP 규격에 맞춰 개발</a:t>
-            </a:r>
-            <a:endParaRPr lang="en-US" sz="1150" dirty="0"/>
+              <a:t>EMR → 게이트웨이 → 데이터 표준화 → 전처리 → LLM → 후처리로 이어지는 데이터 파이프라인 설계</a:t>
+            </a:r>
+            <a:endParaRPr lang="en-US" sz="900" dirty="0"/>
           </a:p>
           <a:p>
             <a:pPr marL="152400" indent="-152400">
@@ -20513,7 +20570,7 @@
               <a:buChar char="•"/>
             </a:pPr>
             <a:r>
-              <a:rPr lang="en-US" sz="1150" dirty="0">
+              <a:rPr lang="en-US" sz="900" dirty="0">
                 <a:solidFill>
                   <a:srgbClr val="1A1D24"/>
                 </a:solidFill>
@@ -20521,9 +20578,9 @@
                 <a:ea typeface="Malgun Gothic" pitchFamily="34" charset="-122"/>
                 <a:cs typeface="Malgun Gothic" pitchFamily="34" charset="-120"/>
               </a:rPr>
-              <a:t>AI Agent 설계 일부와 프로젝트 리드를 맡아 팀원과 함께 설계·개발 진행</a:t>
-            </a:r>
-            <a:endParaRPr lang="en-US" sz="1150" dirty="0"/>
+              <a:t>서비스별 단일 컨테이너 구조에서 멀티 컨테이너(Nginx, MSA 기반 Scaling) 구조로 확장 설계</a:t>
+            </a:r>
+            <a:endParaRPr lang="en-US" sz="900" dirty="0"/>
           </a:p>
           <a:p>
             <a:pPr marL="152400" indent="-152400">
@@ -20537,7 +20594,7 @@
               <a:buChar char="•"/>
             </a:pPr>
             <a:r>
-              <a:rPr lang="en-US" sz="1150" dirty="0">
+              <a:rPr lang="en-US" sz="900" dirty="0">
                 <a:solidFill>
                   <a:srgbClr val="1A1D24"/>
                 </a:solidFill>
@@ -20545,10 +20602,71 @@
                 <a:ea typeface="Malgun Gothic" pitchFamily="34" charset="-122"/>
                 <a:cs typeface="Malgun Gothic" pitchFamily="34" charset="-120"/>
               </a:rPr>
-              <a:t>Prometheus · Loki · Tempo · Grafana 기반 모니터링 설계</a:t>
-            </a:r>
-            <a:endParaRPr lang="en-US" sz="1150" dirty="0"/>
-          </a:p>
+              <a:t>스트레스 테스트, 보안 취약점 점검 대응 및 로깅·모니터링 기반 vLLM 추론 성능·시스템 개선 수행</a:t>
+            </a:r>
+            <a:endParaRPr lang="en-US" sz="900" dirty="0"/>
+          </a:p>
+        </p:txBody>
+      </p:sp>
+      <p:sp>
+        <p:nvSpPr>
+          <p:cNvPr id="12" name="Text 9"/>
+          <p:cNvSpPr txBox="1"/>
+          <p:nvPr/>
+        </p:nvSpPr>
+        <p:spPr>
+          <a:xfrm>
+            <a:off x="6995160" y="5362620"/>
+            <a:ext cx="4647895" cy="256032"/>
+          </a:xfrm>
+          <a:prstGeom prst="rect">
+            <a:avLst/>
+          </a:prstGeom>
+          <a:noFill/>
+          <a:ln/>
+        </p:spPr>
+        <p:txBody>
+          <a:bodyPr wrap="square" lIns="0" tIns="0" rIns="0" bIns="0" rtlCol="0" anchor="t"/>
+          <a:lstStyle/>
+          <a:p>
+            <a:pPr indent="0" marL="0">
+              <a:buNone/>
+            </a:pPr>
+            <a:r>
+              <a:rPr lang="en-US" sz="950" b="1" spc="200" kern="0" dirty="0">
+                <a:solidFill>
+                  <a:srgbClr val="1F6FE0"/>
+                </a:solidFill>
+                <a:latin typeface="Malgun Gothic" pitchFamily="34" charset="0"/>
+                <a:ea typeface="Malgun Gothic" pitchFamily="34" charset="-122"/>
+                <a:cs typeface="Malgun Gothic" pitchFamily="34" charset="-120"/>
+              </a:rPr>
+              <a:t>주요 성과 · 포인트</a:t>
+            </a:r>
+            <a:endParaRPr lang="en-US" sz="950" dirty="0"/>
+          </a:p>
+        </p:txBody>
+      </p:sp>
+      <p:sp>
+        <p:nvSpPr>
+          <p:cNvPr id="13" name="Text 10"/>
+          <p:cNvSpPr txBox="1"/>
+          <p:nvPr/>
+        </p:nvSpPr>
+        <p:spPr>
+          <a:xfrm>
+            <a:off x="6995160" y="5636940"/>
+            <a:ext cx="4647895" cy="597789"/>
+          </a:xfrm>
+          <a:prstGeom prst="rect">
+            <a:avLst/>
+          </a:prstGeom>
+          <a:noFill/>
+          <a:ln/>
+        </p:spPr>
+        <p:txBody>
+          <a:bodyPr wrap="square" lIns="0" tIns="0" rIns="0" bIns="0" rtlCol="0" anchor="t"/>
+          <a:lstStyle/>
           <a:p>
             <a:pPr marL="152400" indent="-152400">
               <a:lnSpc>
@@ -20561,7 +20679,7 @@
               <a:buChar char="•"/>
             </a:pPr>
             <a:r>
-              <a:rPr lang="en-US" sz="1150" dirty="0">
+              <a:rPr lang="en-US" sz="900" dirty="0">
                 <a:solidFill>
                   <a:srgbClr val="1A1D24"/>
                 </a:solidFill>
@@ -20569,71 +20687,10 @@
                 <a:ea typeface="Malgun Gothic" pitchFamily="34" charset="-122"/>
                 <a:cs typeface="Malgun Gothic" pitchFamily="34" charset="-120"/>
               </a:rPr>
-              <a:t>OCR 시스템 연동, 건강검진 데이터 자동 생성 프로젝트 병행 진행</a:t>
-            </a:r>
-            <a:endParaRPr lang="en-US" sz="1150" dirty="0"/>
-          </a:p>
-        </p:txBody>
-      </p:sp>
-      <p:sp>
-        <p:nvSpPr>
-          <p:cNvPr id="11" name="Text 9"/>
-          <p:cNvSpPr txBox="1"/>
-          <p:nvPr/>
-        </p:nvSpPr>
-        <p:spPr>
-          <a:xfrm>
-            <a:off x="7726680" y="4201097"/>
-            <a:ext cx="3916375" cy="256032"/>
-          </a:xfrm>
-          <a:prstGeom prst="rect">
-            <a:avLst/>
-          </a:prstGeom>
-          <a:noFill/>
-          <a:ln/>
-        </p:spPr>
-        <p:txBody>
-          <a:bodyPr wrap="square" lIns="0" tIns="0" rIns="0" bIns="0" rtlCol="0" anchor="t"/>
-          <a:lstStyle/>
-          <a:p>
-            <a:pPr indent="0" marL="0">
-              <a:buNone/>
-            </a:pPr>
-            <a:r>
-              <a:rPr lang="en-US" sz="950" b="1" spc="200" kern="0" dirty="0">
-                <a:solidFill>
-                  <a:srgbClr val="1F6FE0"/>
-                </a:solidFill>
-                <a:latin typeface="Malgun Gothic" pitchFamily="34" charset="0"/>
-                <a:ea typeface="Malgun Gothic" pitchFamily="34" charset="-122"/>
-                <a:cs typeface="Malgun Gothic" pitchFamily="34" charset="-120"/>
-              </a:rPr>
-              <a:t>주요 성과 · 포인트</a:t>
-            </a:r>
-            <a:endParaRPr lang="en-US" sz="950" dirty="0"/>
-          </a:p>
-        </p:txBody>
-      </p:sp>
-      <p:sp>
-        <p:nvSpPr>
-          <p:cNvPr id="12" name="Text 10"/>
-          <p:cNvSpPr txBox="1"/>
-          <p:nvPr/>
-        </p:nvSpPr>
-        <p:spPr>
-          <a:xfrm>
-            <a:off x="7726680" y="4475417"/>
-            <a:ext cx="3916375" cy="681038"/>
-          </a:xfrm>
-          <a:prstGeom prst="rect">
-            <a:avLst/>
-          </a:prstGeom>
-          <a:noFill/>
-          <a:ln/>
-        </p:spPr>
-        <p:txBody>
-          <a:bodyPr wrap="square" lIns="0" tIns="0" rIns="0" bIns="0" rtlCol="0" anchor="t"/>
-          <a:lstStyle/>
+              <a:t>세브란스 3개 병원에 5종 서식, 1개 병원에 1종 서식 적용 (운영 배포)</a:t>
+            </a:r>
+            <a:endParaRPr lang="en-US" sz="900" dirty="0"/>
+          </a:p>
           <a:p>
             <a:pPr marL="152400" indent="-152400">
               <a:lnSpc>
@@ -20646,7 +20703,7 @@
               <a:buChar char="•"/>
             </a:pPr>
             <a:r>
-              <a:rPr lang="en-US" sz="1150" dirty="0">
+              <a:rPr lang="en-US" sz="900" dirty="0">
                 <a:solidFill>
                   <a:srgbClr val="1A1D24"/>
                 </a:solidFill>
@@ -20654,22 +20711,22 @@
                 <a:ea typeface="Malgun Gothic" pitchFamily="34" charset="-122"/>
                 <a:cs typeface="Malgun Gothic" pitchFamily="34" charset="-120"/>
               </a:rPr>
-              <a:t>파이프라인을 확장 가능한 구조로 고도화하며 AI 기반 서비스의 아키텍처 설계 및 실무 경험을 축적</a:t>
-            </a:r>
-            <a:endParaRPr lang="en-US" sz="1150" dirty="0"/>
-          </a:p>
-        </p:txBody>
-      </p:sp>
-      <p:sp>
-        <p:nvSpPr>
-          <p:cNvPr id="13" name="Text 11"/>
+              <a:t>실제 병원 업무에 LLM을 적용하고 운영하며 AI 서비스의 개발·운영 경험을 축적</a:t>
+            </a:r>
+            <a:endParaRPr lang="en-US" sz="900" dirty="0"/>
+          </a:p>
+        </p:txBody>
+      </p:sp>
+      <p:sp>
+        <p:nvSpPr>
+          <p:cNvPr id="14" name="Text 11"/>
           <p:cNvSpPr txBox="1"/>
           <p:nvPr/>
         </p:nvSpPr>
         <p:spPr>
           <a:xfrm>
             <a:off x="548640" y="5555171"/>
-            <a:ext cx="6766560" cy="237744"/>
+            <a:ext cx="6035040" cy="237744"/>
           </a:xfrm>
           <a:prstGeom prst="rect">
             <a:avLst/>
@@ -20701,14 +20758,14 @@
       </p:sp>
       <p:sp>
         <p:nvSpPr>
-          <p:cNvPr id="14" name="Text 12"/>
+          <p:cNvPr id="15" name="Text 12"/>
           <p:cNvSpPr txBox="1"/>
           <p:nvPr/>
         </p:nvSpPr>
         <p:spPr>
           <a:xfrm>
             <a:off x="548640" y="5811203"/>
-            <a:ext cx="6766560" cy="543878"/>
+            <a:ext cx="6035040" cy="543878"/>
           </a:xfrm>
           <a:prstGeom prst="rect">
             <a:avLst/>
@@ -20735,7 +20792,7 @@
                 <a:ea typeface="Malgun Gothic" pitchFamily="34" charset="-122"/>
                 <a:cs typeface="Malgun Gothic" pitchFamily="34" charset="-120"/>
               </a:rPr>
-              <a:t>Python  ·  AI Agent / MCP  ·  Kafka  ·  vLLM  ·  Prometheus  ·  Loki  ·  Tempo  ·  Grafana  ·  Docker</a:t>
+              <a:t>Python  ·  FastAPI  ·  vLLM  ·  Docker  ·  Nginx  ·  Redis  ·  PostgreSQL  ·  MongoDB  ·  Elasticsearch  ·  HL7 FHIR  ·  Grafana</a:t>
             </a:r>
             <a:endParaRPr lang="en-US" sz="950" dirty="0"/>
           </a:p>
@@ -20743,7 +20800,7 @@
       </p:sp>
       <p:sp>
         <p:nvSpPr>
-          <p:cNvPr id="15" name="Text 13"/>
+          <p:cNvPr id="16" name="Text 13"/>
           <p:cNvSpPr txBox="1"/>
           <p:nvPr/>
         </p:nvSpPr>
@@ -20782,7 +20839,7 @@
       </p:sp>
       <p:sp>
         <p:nvSpPr>
-          <p:cNvPr id="16" name="Text 14"/>
+          <p:cNvPr id="17" name="Text 14"/>
           <p:cNvSpPr txBox="1"/>
           <p:nvPr/>
         </p:nvSpPr>
@@ -20884,7 +20941,21 @@
                 <a:ea typeface="Malgun Gothic" pitchFamily="34" charset="-122"/>
                 <a:cs typeface="Malgun Gothic" pitchFamily="34" charset="-120"/>
               </a:rPr>
-              <a:t>02  EMR 데이터 FHIR 변환 통합 관리 시스템 설계 및 개발</a:t>
+              <a:t>02  LLM 기반 의료 기록지 자동 생성 플랫폼</a:t>
+            </a:r>
+            <a:pPr indent="0" marL="0">
+              <a:buNone/>
+            </a:pPr>
+            <a:r>
+              <a:rPr lang="en-US" sz="1100" dirty="0">
+                <a:solidFill>
+                  <a:srgbClr val="6B7280"/>
+                </a:solidFill>
+                <a:latin typeface="Malgun Gothic" pitchFamily="34" charset="0"/>
+                <a:ea typeface="Malgun Gothic" pitchFamily="34" charset="-122"/>
+                <a:cs typeface="Malgun Gothic" pitchFamily="34" charset="-120"/>
+              </a:rPr>
+              <a:t>   ·   2 / 2</a:t>
             </a:r>
             <a:endParaRPr lang="en-US" sz="1100" dirty="0"/>
           </a:p>
@@ -20923,7 +20994,7 @@
                 <a:ea typeface="Malgun Gothic" pitchFamily="34" charset="-122"/>
                 <a:cs typeface="Malgun Gothic" pitchFamily="34" charset="-120"/>
               </a:rPr>
-              <a:t>EMR 데이터 FHIR 변환 통합 관리 시스템 설계 및 개발</a:t>
+              <a:t>서식 생성 파이프라인 AI Agent 고도화 및 확장 사업</a:t>
             </a:r>
             <a:endParaRPr lang="en-US" sz="2200" dirty="0"/>
           </a:p>
@@ -20962,7 +21033,7 @@
                 <a:ea typeface="Malgun Gothic" pitchFamily="34" charset="-122"/>
                 <a:cs typeface="Malgun Gothic" pitchFamily="34" charset="-120"/>
               </a:rPr>
-              <a:t>파이 디지털 헬스케어   ·   2024.06 ~ 현재      Backend / Frontend / AI / LLM</a:t>
+              <a:t>파이 디지털 헬스케어   ·   2026.06 ~ 현재      AI / LLM / Backend / Monitoring</a:t>
             </a:r>
             <a:endParaRPr lang="en-US" sz="1050" dirty="0"/>
           </a:p>
@@ -20977,7 +21048,7 @@
         <p:spPr>
           <a:xfrm>
             <a:off x="548640" y="1645920"/>
-            <a:ext cx="6035040" cy="506095"/>
+            <a:ext cx="6766560" cy="506095"/>
           </a:xfrm>
           <a:prstGeom prst="rect">
             <a:avLst/>
@@ -21021,7 +21092,7 @@
                 <a:ea typeface="Malgun Gothic" pitchFamily="34" charset="-122"/>
                 <a:cs typeface="Malgun Gothic" pitchFamily="34" charset="-120"/>
               </a:rPr>
-              <a:t>병원마다 다른 진료 기록을 세계 표준 형식으로 바꿔 주는 변환 도구를 만들었고, 이 방식으로 특허를 받았습니다.</a:t>
+              <a:t>서식 생성 파이프라인을 AI Agent 구조로 다시 설계해 확장하기 쉽게 만들고, 검진 데이터·OCR 연동을 병행했습니다.</a:t>
             </a:r>
             <a:endParaRPr lang="en-US" sz="1250" dirty="0"/>
           </a:p>
@@ -21036,7 +21107,7 @@
         <p:spPr>
           <a:xfrm>
             <a:off x="548640" y="2261743"/>
-            <a:ext cx="6035040" cy="736283"/>
+            <a:ext cx="6766560" cy="506095"/>
           </a:xfrm>
           <a:prstGeom prst="rect">
             <a:avLst/>
@@ -21063,7 +21134,7 @@
                 <a:ea typeface="Malgun Gothic" pitchFamily="34" charset="-122"/>
                 <a:cs typeface="Malgun Gothic" pitchFamily="34" charset="-120"/>
               </a:rPr>
-              <a:t>병원마다 다른 의료데이터를 국제 표준인 HL7 FHIR 형식으로 변환하고 관리하는 웹 기반 통합 시스템. 변환 방식에 대한 특허 출원 및 등록 완료.</a:t>
+              <a:t>늘어나는 전·후처리 요구사항에 대응하기 위해 서식 생성 파이프라인을 Kafka + AI Agent 구조로 재설계하고, 검진 데이터·OCR 연동 등 확장 사업을 병행.</a:t>
             </a:r>
             <a:endParaRPr lang="en-US" sz="1250" dirty="0"/>
           </a:p>
@@ -21077,12 +21148,12 @@
         </p:nvSpPr>
         <p:spPr>
           <a:xfrm>
-            <a:off x="548640" y="3135185"/>
-            <a:ext cx="6035040" cy="2004060"/>
+            <a:off x="548640" y="2904998"/>
+            <a:ext cx="6766560" cy="1691640"/>
           </a:xfrm>
           <a:prstGeom prst="roundRect">
             <a:avLst>
-              <a:gd name="adj" fmla="val 3650"/>
+              <a:gd name="adj" fmla="val 4324"/>
             </a:avLst>
           </a:prstGeom>
           <a:solidFill>
@@ -21104,8 +21175,8 @@
         </p:nvSpPr>
         <p:spPr>
           <a:xfrm>
-            <a:off x="822960" y="3272345"/>
-            <a:ext cx="5486400" cy="1775460"/>
+            <a:off x="822960" y="3042158"/>
+            <a:ext cx="6217920" cy="1463040"/>
           </a:xfrm>
           <a:prstGeom prst="rect">
             <a:avLst/>
@@ -21135,7 +21206,7 @@
                 <a:ea typeface="Malgun Gothic" pitchFamily="34" charset="-122"/>
                 <a:cs typeface="Malgun Gothic" pitchFamily="34" charset="-120"/>
               </a:rPr>
-              <a:t>병원마다 다른 의료데이터를 국제 표준인 HL7 FHIR 형식으로 변환하고 관리할 수 있는 웹 기반 통합 시스템을 설계·개발했습니다.</a:t>
+              <a:t>서식 작성에 대한 요구사항이 늘어나면서 전·후처리 항목이 계속 추가되었고 코드도 점점 복잡해져, 2026년부터 서식 생성 파이프라인을 AI Agent 구조로 고도화하기로 결정했습니다.</a:t>
             </a:r>
             <a:endParaRPr lang="en-US" sz="1200" dirty="0"/>
           </a:p>
@@ -21158,69 +21229,22 @@
                 <a:ea typeface="Malgun Gothic" pitchFamily="34" charset="-122"/>
                 <a:cs typeface="Malgun Gothic" pitchFamily="34" charset="-120"/>
               </a:rPr>
-              <a:t>기존에는 FHIR 변환 과정에 필요한 여러 도구를 개별적으로 활용해야 했는데, 이를 하나의 시스템으로 통합했습니다.</a:t>
+              <a:t>전·후처리 영역을 Tool 단위로 나누어 구분하고, 이후 일부 판단 영역은 Agent에게 맡길 수 있도록 구조를 잡았습니다. 이 과정에서 검진 데이터, OCR 연동 같은 확장 포인트를 찾아 세브란스와 신규 계약을 진행했습니다.</a:t>
             </a:r>
             <a:endParaRPr lang="en-US" sz="1200" dirty="0"/>
           </a:p>
-          <a:p>
-            <a:pPr indent="0" marL="0">
-              <a:lnSpc>
-                <a:spcPct val="135000"/>
-              </a:lnSpc>
-              <a:spcAft>
-                <a:spcPts val="600"/>
-              </a:spcAft>
-              <a:buNone/>
-            </a:pPr>
-            <a:r>
-              <a:rPr lang="en-US" sz="1200" dirty="0">
-                <a:solidFill>
-                  <a:srgbClr val="444B57"/>
-                </a:solidFill>
-                <a:latin typeface="Malgun Gothic" pitchFamily="34" charset="0"/>
-                <a:ea typeface="Malgun Gothic" pitchFamily="34" charset="-122"/>
-                <a:cs typeface="Malgun Gothic" pitchFamily="34" charset="-120"/>
-              </a:rPr>
-              <a:t>의료기관의 데이터 구조와 변환 요구사항을 고려해 확장성 있게 시스템을 설계했으며, 변환 방식에 대한 특허를 출원하고 등록까지 완료했습니다.</a:t>
-            </a:r>
-            <a:endParaRPr lang="en-US" sz="1200" dirty="0"/>
-          </a:p>
-        </p:txBody>
-      </p:sp>
-      <p:pic>
-        <p:nvPicPr>
-          <p:cNvPr id="9" name="Image 0" descr="/home/user/portfolio/assets/images/projects/fhir-workbench-1.jpg">    </p:cNvPr>
-          <p:cNvPicPr>
-            <a:picLocks noChangeAspect="1"/>
-          </p:cNvPicPr>
-          <p:nvPr/>
-        </p:nvPicPr>
-        <p:blipFill>
-          <a:blip r:embed="rId1"/>
-          <a:stretch>
-            <a:fillRect/>
-          </a:stretch>
-        </p:blipFill>
-        <p:spPr>
-          <a:xfrm>
-            <a:off x="6995160" y="1645920"/>
-            <a:ext cx="3665989" cy="1706976"/>
-          </a:xfrm>
-          <a:prstGeom prst="rect">
-            <a:avLst/>
-          </a:prstGeom>
-        </p:spPr>
-      </p:pic>
-      <p:sp>
-        <p:nvSpPr>
-          <p:cNvPr id="10" name="Text 7"/>
-          <p:cNvSpPr txBox="1"/>
-          <p:nvPr/>
-        </p:nvSpPr>
-        <p:spPr>
-          <a:xfrm>
-            <a:off x="6995160" y="3535776"/>
-            <a:ext cx="4647895" cy="256032"/>
+        </p:txBody>
+      </p:sp>
+      <p:sp>
+        <p:nvSpPr>
+          <p:cNvPr id="9" name="Text 7"/>
+          <p:cNvSpPr txBox="1"/>
+          <p:nvPr/>
+        </p:nvSpPr>
+        <p:spPr>
+          <a:xfrm>
+            <a:off x="7726680" y="1645920"/>
+            <a:ext cx="3916375" cy="256032"/>
           </a:xfrm>
           <a:prstGeom prst="rect">
             <a:avLst/>
@@ -21252,14 +21276,14 @@
       </p:sp>
       <p:sp>
         <p:nvSpPr>
-          <p:cNvPr id="11" name="Text 8"/>
-          <p:cNvSpPr txBox="1"/>
-          <p:nvPr/>
-        </p:nvSpPr>
-        <p:spPr>
-          <a:xfrm>
-            <a:off x="6995160" y="3810096"/>
-            <a:ext cx="4647895" cy="1370457"/>
+          <p:cNvPr id="10" name="Text 8"/>
+          <p:cNvSpPr txBox="1"/>
+          <p:nvPr/>
+        </p:nvSpPr>
+        <p:spPr>
+          <a:xfrm>
+            <a:off x="7726680" y="1920240"/>
+            <a:ext cx="3916375" cy="2116265"/>
           </a:xfrm>
           <a:prstGeom prst="rect">
             <a:avLst/>
@@ -21282,7 +21306,7 @@
               <a:buChar char="•"/>
             </a:pPr>
             <a:r>
-              <a:rPr lang="en-US" sz="900" dirty="0">
+              <a:rPr lang="en-US" sz="1150" dirty="0">
                 <a:solidFill>
                   <a:srgbClr val="1A1D24"/>
                 </a:solidFill>
@@ -21290,9 +21314,9 @@
                 <a:ea typeface="Malgun Gothic" pitchFamily="34" charset="-122"/>
                 <a:cs typeface="Malgun Gothic" pitchFamily="34" charset="-120"/>
               </a:rPr>
-              <a:t>전체 아키텍처 설계부터 React·FastAPI 기반 프론트엔드·백엔드 개발 및 배포·운영</a:t>
-            </a:r>
-            <a:endParaRPr lang="en-US" sz="900" dirty="0"/>
+              <a:t>AI Agent 고도화: 서식 생성 파이프라인을 Kafka + AI Agent 구조로 재설계하고, 확장을 고려해 Tool을 MCP 규격에 맞춰 개발</a:t>
+            </a:r>
+            <a:endParaRPr lang="en-US" sz="1150" dirty="0"/>
           </a:p>
           <a:p>
             <a:pPr marL="152400" indent="-152400">
@@ -21306,7 +21330,7 @@
               <a:buChar char="•"/>
             </a:pPr>
             <a:r>
-              <a:rPr lang="en-US" sz="900" dirty="0">
+              <a:rPr lang="en-US" sz="1150" dirty="0">
                 <a:solidFill>
                   <a:srgbClr val="1A1D24"/>
                 </a:solidFill>
@@ -21314,9 +21338,9 @@
                 <a:ea typeface="Malgun Gothic" pitchFamily="34" charset="-122"/>
                 <a:cs typeface="Malgun Gothic" pitchFamily="34" charset="-120"/>
               </a:rPr>
-              <a:t>자체 변환 Rule(DSL)을 설계하여 의료데이터의 FHIR 변환 및 매핑 기능 구현</a:t>
-            </a:r>
-            <a:endParaRPr lang="en-US" sz="900" dirty="0"/>
+              <a:t>AI Agent 설계 일부와 프로젝트 리드를 맡아 팀원과 함께 설계·개발 진행</a:t>
+            </a:r>
+            <a:endParaRPr lang="en-US" sz="1150" dirty="0"/>
           </a:p>
           <a:p>
             <a:pPr marL="152400" indent="-152400">
@@ -21330,7 +21354,7 @@
               <a:buChar char="•"/>
             </a:pPr>
             <a:r>
-              <a:rPr lang="en-US" sz="900" dirty="0">
+              <a:rPr lang="en-US" sz="1150" dirty="0">
                 <a:solidFill>
                   <a:srgbClr val="1A1D24"/>
                 </a:solidFill>
@@ -21338,9 +21362,9 @@
                 <a:ea typeface="Malgun Gothic" pitchFamily="34" charset="-122"/>
                 <a:cs typeface="Malgun Gothic" pitchFamily="34" charset="-120"/>
               </a:rPr>
-              <a:t>Profile·Terminology 관리, 변환 결과 Validation, FHIR Server 연동, IG 발행 등 FHIR 변환 전 과정 통합</a:t>
-            </a:r>
-            <a:endParaRPr lang="en-US" sz="900" dirty="0"/>
+              <a:t>Prometheus · Loki · Tempo · Grafana 기반 모니터링 설계</a:t>
+            </a:r>
+            <a:endParaRPr lang="en-US" sz="1150" dirty="0"/>
           </a:p>
           <a:p>
             <a:pPr marL="152400" indent="-152400">
@@ -21354,7 +21378,7 @@
               <a:buChar char="•"/>
             </a:pPr>
             <a:r>
-              <a:rPr lang="en-US" sz="900" dirty="0">
+              <a:rPr lang="en-US" sz="1150" dirty="0">
                 <a:solidFill>
                   <a:srgbClr val="1A1D24"/>
                 </a:solidFill>
@@ -21362,22 +21386,22 @@
                 <a:ea typeface="Malgun Gothic" pitchFamily="34" charset="-122"/>
                 <a:cs typeface="Malgun Gothic" pitchFamily="34" charset="-120"/>
               </a:rPr>
-              <a:t>변환 이력·권한·감사 로그 등 운영 및 관리 기능 개발</a:t>
-            </a:r>
-            <a:endParaRPr lang="en-US" sz="900" dirty="0"/>
-          </a:p>
-        </p:txBody>
-      </p:sp>
-      <p:sp>
-        <p:nvSpPr>
-          <p:cNvPr id="12" name="Text 9"/>
-          <p:cNvSpPr txBox="1"/>
-          <p:nvPr/>
-        </p:nvSpPr>
-        <p:spPr>
-          <a:xfrm>
-            <a:off x="6995160" y="5345145"/>
-            <a:ext cx="4647895" cy="256032"/>
+              <a:t>OCR 시스템 연동, 건강검진 데이터 자동 생성 프로젝트 병행 진행</a:t>
+            </a:r>
+            <a:endParaRPr lang="en-US" sz="1150" dirty="0"/>
+          </a:p>
+        </p:txBody>
+      </p:sp>
+      <p:sp>
+        <p:nvSpPr>
+          <p:cNvPr id="11" name="Text 9"/>
+          <p:cNvSpPr txBox="1"/>
+          <p:nvPr/>
+        </p:nvSpPr>
+        <p:spPr>
+          <a:xfrm>
+            <a:off x="7726680" y="4201097"/>
+            <a:ext cx="3916375" cy="256032"/>
           </a:xfrm>
           <a:prstGeom prst="rect">
             <a:avLst/>
@@ -21409,14 +21433,14 @@
       </p:sp>
       <p:sp>
         <p:nvSpPr>
-          <p:cNvPr id="13" name="Text 10"/>
-          <p:cNvSpPr txBox="1"/>
-          <p:nvPr/>
-        </p:nvSpPr>
-        <p:spPr>
-          <a:xfrm>
-            <a:off x="6995160" y="5619465"/>
-            <a:ext cx="4647895" cy="597789"/>
+          <p:cNvPr id="12" name="Text 10"/>
+          <p:cNvSpPr txBox="1"/>
+          <p:nvPr/>
+        </p:nvSpPr>
+        <p:spPr>
+          <a:xfrm>
+            <a:off x="7726680" y="4475417"/>
+            <a:ext cx="3916375" cy="681038"/>
           </a:xfrm>
           <a:prstGeom prst="rect">
             <a:avLst/>
@@ -21439,7 +21463,7 @@
               <a:buChar char="•"/>
             </a:pPr>
             <a:r>
-              <a:rPr lang="en-US" sz="900" dirty="0">
+              <a:rPr lang="en-US" sz="1150" dirty="0">
                 <a:solidFill>
                   <a:srgbClr val="1A1D24"/>
                 </a:solidFill>
@@ -21447,46 +21471,22 @@
                 <a:ea typeface="Malgun Gothic" pitchFamily="34" charset="-122"/>
                 <a:cs typeface="Malgun Gothic" pitchFamily="34" charset="-120"/>
               </a:rPr>
-              <a:t>룰 기반 EMR → FHIR 변환 방식 특허 출원 및 등록</a:t>
-            </a:r>
-            <a:endParaRPr lang="en-US" sz="900" dirty="0"/>
-          </a:p>
-          <a:p>
-            <a:pPr marL="152400" indent="-152400">
-              <a:lnSpc>
-                <a:spcPct val="130000"/>
-              </a:lnSpc>
-              <a:spcAft>
-                <a:spcPts val="400"/>
-              </a:spcAft>
-              <a:buSzPct val="100000"/>
-              <a:buChar char="•"/>
-            </a:pPr>
-            <a:r>
-              <a:rPr lang="en-US" sz="900" dirty="0">
-                <a:solidFill>
-                  <a:srgbClr val="1A1D24"/>
-                </a:solidFill>
-                <a:latin typeface="Malgun Gothic" pitchFamily="34" charset="0"/>
-                <a:ea typeface="Malgun Gothic" pitchFamily="34" charset="-122"/>
-                <a:cs typeface="Malgun Gothic" pitchFamily="34" charset="-120"/>
-              </a:rPr>
-              <a:t>FHIR 변환·검증·발행 과정을 하나의 시스템으로 통합하여 업무 효율성과 재사용성 향상</a:t>
-            </a:r>
-            <a:endParaRPr lang="en-US" sz="900" dirty="0"/>
-          </a:p>
-        </p:txBody>
-      </p:sp>
-      <p:sp>
-        <p:nvSpPr>
-          <p:cNvPr id="14" name="Text 11"/>
+              <a:t>파이프라인을 확장 가능한 구조로 고도화하며 AI 기반 서비스의 아키텍처 설계 및 실무 경험을 축적</a:t>
+            </a:r>
+            <a:endParaRPr lang="en-US" sz="1150" dirty="0"/>
+          </a:p>
+        </p:txBody>
+      </p:sp>
+      <p:sp>
+        <p:nvSpPr>
+          <p:cNvPr id="13" name="Text 11"/>
           <p:cNvSpPr txBox="1"/>
           <p:nvPr/>
         </p:nvSpPr>
         <p:spPr>
           <a:xfrm>
             <a:off x="548640" y="5555171"/>
-            <a:ext cx="6035040" cy="237744"/>
+            <a:ext cx="6766560" cy="237744"/>
           </a:xfrm>
           <a:prstGeom prst="rect">
             <a:avLst/>
@@ -21518,14 +21518,14 @@
       </p:sp>
       <p:sp>
         <p:nvSpPr>
-          <p:cNvPr id="15" name="Text 12"/>
+          <p:cNvPr id="14" name="Text 12"/>
           <p:cNvSpPr txBox="1"/>
           <p:nvPr/>
         </p:nvSpPr>
         <p:spPr>
           <a:xfrm>
             <a:off x="548640" y="5811203"/>
-            <a:ext cx="6035040" cy="543878"/>
+            <a:ext cx="6766560" cy="543878"/>
           </a:xfrm>
           <a:prstGeom prst="rect">
             <a:avLst/>
@@ -21552,7 +21552,7 @@
                 <a:ea typeface="Malgun Gothic" pitchFamily="34" charset="-122"/>
                 <a:cs typeface="Malgun Gothic" pitchFamily="34" charset="-120"/>
               </a:rPr>
-              <a:t>Python  ·  FastAPI  ·  React  ·  HL7 FHIR  ·  HAPI FHIR  ·  SUSHI / IG Publisher  ·  MariaDB  ·  MongoDB  ·  Redis  ·  Docker Compose  ·  XML</a:t>
+              <a:t>Python  ·  AI Agent / MCP  ·  Kafka  ·  vLLM  ·  Prometheus  ·  Loki  ·  Tempo  ·  Grafana  ·  Docker</a:t>
             </a:r>
             <a:endParaRPr lang="en-US" sz="950" dirty="0"/>
           </a:p>
@@ -21560,7 +21560,7 @@
       </p:sp>
       <p:sp>
         <p:nvSpPr>
-          <p:cNvPr id="16" name="Text 13"/>
+          <p:cNvPr id="15" name="Text 13"/>
           <p:cNvSpPr txBox="1"/>
           <p:nvPr/>
         </p:nvSpPr>
@@ -21599,7 +21599,7 @@
       </p:sp>
       <p:sp>
         <p:nvSpPr>
-          <p:cNvPr id="17" name="Text 14"/>
+          <p:cNvPr id="16" name="Text 14"/>
           <p:cNvSpPr txBox="1"/>
           <p:nvPr/>
         </p:nvSpPr>

--- a/assets/Dongsu_Park_Portfolio.pptx
+++ b/assets/Dongsu_Park_Portfolio.pptx
@@ -10223,7 +10223,7 @@
                 <a:ea typeface="Malgun Gothic" pitchFamily="34" charset="-122"/>
                 <a:cs typeface="Malgun Gothic" pitchFamily="34" charset="-120"/>
               </a:rPr>
-              <a:t>2018.07 ~ 현재 · 총 8년 3개월</a:t>
+              <a:t>2018.07 ~ 현재 · 총 8년 4개월</a:t>
             </a:r>
             <a:endParaRPr lang="en-US" sz="1500" dirty="0"/>
           </a:p>
@@ -10289,7 +10289,7 @@
                 <a:ea typeface="Malgun Gothic" pitchFamily="34" charset="-122"/>
                 <a:cs typeface="Malgun Gothic" pitchFamily="34" charset="-120"/>
               </a:rPr>
-              <a:t>2022.11 ~ 현재 (3년 11개월)</a:t>
+              <a:t>2022.11 ~ 현재 (4년)</a:t>
             </a:r>
             <a:endParaRPr lang="en-US" sz="1050" dirty="0"/>
           </a:p>
@@ -16261,7 +16261,7 @@
                 <a:ea typeface="Malgun Gothic" pitchFamily="34" charset="-122"/>
                 <a:cs typeface="Malgun Gothic" pitchFamily="34" charset="-120"/>
               </a:rPr>
-              <a:t>2022.11 ~ 현재  (3년 11개월)</a:t>
+              <a:t>2022.11 ~ 현재  (4년)</a:t>
             </a:r>
             <a:endParaRPr lang="en-US" sz="1200" dirty="0"/>
           </a:p>
@@ -16408,7 +16408,7 @@
                 <a:ea typeface="Malgun Gothic" pitchFamily="34" charset="-122"/>
                 <a:cs typeface="Malgun Gothic" pitchFamily="34" charset="-120"/>
               </a:rPr>
-              <a:t>이직 사유: 아주대학교 의료정보학과에서 근무하던 중, 학과 내 의대 교수님의 제안을 받아 현 직장으로 이직</a:t>
+              <a:t>이직 사유: 아주대학교 의료정보학과에서 함께 업무를 수행하던 의대 교수님의 파이디지털헬스케어 CTO 합류와 함께 스카우트 제의를 받아 이직</a:t>
             </a:r>
             <a:endParaRPr lang="en-US" sz="1100" dirty="0"/>
           </a:p>
